--- a/public/presentations/culture-presentation.pptx
+++ b/public/presentations/culture-presentation.pptx
@@ -10,8 +10,11 @@
     <p:sldId id="257" r:id="rId5"/>
     <p:sldId id="258" r:id="rId6"/>
     <p:sldId id="259" r:id="rId7"/>
+    <p:sldId id="260" r:id="rId8"/>
+    <p:sldId id="261" r:id="rId9"/>
+    <p:sldId id="262" r:id="rId10"/>
   </p:sldIdLst>
-  <p:sldSz cx="9144000" cy="6858000"/>
+  <p:sldSz cx="12192000" cy="6858000"/>
   <p:notesSz cx="7772400" cy="10058400"/>
 </p:presentation>
 </file>
@@ -175,7 +178,7 @@
                 <a:uFillTx/>
                 <a:latin typeface="Calibri"/>
               </a:rPr>
-              <a:t>&lt;date/time&gt;</a:t>
+              <a:t> </a:t>
             </a:r>
             <a:endParaRPr lang="en-US" sz="1200" b="0" u="none" strike="noStrike">
               <a:solidFill>
@@ -241,7 +244,7 @@
                 <a:uFillTx/>
                 <a:latin typeface="Times New Roman"/>
               </a:rPr>
-              <a:t>&lt;footer&gt;</a:t>
+              <a:t> </a:t>
             </a:r>
             <a:endParaRPr lang="en-US" sz="1400" b="0" u="none" strike="noStrike">
               <a:solidFill>
@@ -306,7 +309,7 @@
               </a:lnSpc>
               <a:buNone/>
             </a:pPr>
-            <a:fld id="{609B2C46-58BB-4DB3-8E08-6A288E2BC45A}" type="slidenum">
+            <a:fld id="{3BF67015-F3DF-4AE4-A1C9-9D2AAA84630A}" type="slidenum">
               <a:rPr lang="en-US" sz="1200" b="0" u="none" strike="noStrike">
                 <a:solidFill>
                   <a:schemeClr val="dk1">
@@ -317,7 +320,7 @@
                 <a:uFillTx/>
                 <a:latin typeface="Calibri"/>
               </a:rPr>
-              <a:t>&lt;number&gt;</a:t>
+              <a:t>7</a:t>
             </a:fld>
             <a:endParaRPr lang="en-US" sz="1200" b="0" u="none" strike="noStrike">
               <a:solidFill>
@@ -342,8 +345,8 @@
         </p:nvSpPr>
         <p:spPr>
           <a:xfrm>
-            <a:off x="457200" y="1604520"/>
-            <a:ext cx="8229240" cy="3977280"/>
+            <a:off x="609480" y="1604520"/>
+            <a:ext cx="10972080" cy="3977280"/>
           </a:xfrm>
           <a:prstGeom prst="rect">
             <a:avLst/>
@@ -1404,7 +1407,7 @@
               </a:lnSpc>
               <a:buNone/>
             </a:pPr>
-            <a:fld id="{6F7D7021-F71E-4EC2-96E3-17AE698B4ED4}" type="slidenum">
+            <a:fld id="{5F545835-9B93-43B3-9883-32E897F524D0}" type="slidenum">
               <a:rPr lang="en-US" sz="1200" b="0" u="none" strike="noStrike">
                 <a:solidFill>
                   <a:schemeClr val="dk1">
@@ -1863,7 +1866,7 @@
               </a:lnSpc>
               <a:buNone/>
             </a:pPr>
-            <a:fld id="{83751C60-9D59-40F2-AB78-C0EE565CBA26}" type="slidenum">
+            <a:fld id="{08667119-AAAA-44C4-B105-DAE56CBF23FB}" type="slidenum">
               <a:rPr lang="en-US" sz="1200" b="0" u="none" strike="noStrike">
                 <a:solidFill>
                   <a:schemeClr val="dk1">
@@ -1897,7 +1900,7 @@
 
 <file path=ppt/slideLayouts/slideLayout12.xml><?xml version="1.0" encoding="utf-8"?>
 <p:sldLayout xmlns:a="http://schemas.openxmlformats.org/drawingml/2006/main" xmlns:p="http://schemas.openxmlformats.org/presentationml/2006/main" xmlns:r="http://schemas.openxmlformats.org/officeDocument/2006/relationships" xmlns:p14="http://schemas.microsoft.com/office/powerpoint/2010/main" xmlns:p15="http://schemas.microsoft.com/office/powerpoint/2012/main" xmlns:mc="http://schemas.openxmlformats.org/markup-compatibility/2006" type="obj" preserve="1">
-  <p:cSld name="Inspiration">
+  <p:cSld name="Midnightblue">
     <p:spTree>
       <p:nvGrpSpPr>
         <p:cNvPr id="1" name=""/>
@@ -1914,7 +1917,7 @@
       </p:grpSpPr>
       <p:sp>
         <p:nvSpPr>
-          <p:cNvPr id="72" name="PlaceHolder 1"/>
+          <p:cNvPr id="68" name="PlaceHolder 1"/>
           <p:cNvSpPr>
             <a:spLocks noGrp="1"/>
           </p:cNvSpPr>
@@ -1924,8 +1927,8 @@
         </p:nvSpPr>
         <p:spPr>
           <a:xfrm>
-            <a:off x="489600" y="543960"/>
-            <a:ext cx="7837560" cy="762120"/>
+            <a:off x="435240" y="272880"/>
+            <a:ext cx="11320920" cy="869760"/>
           </a:xfrm>
           <a:prstGeom prst="rect">
             <a:avLst/>
@@ -1937,13 +1940,13 @@
         </p:spPr>
         <p:txBody>
           <a:bodyPr lIns="0" tIns="0" rIns="0" bIns="0" anchor="ctr">
-            <a:spAutoFit/>
+            <a:noAutofit/>
           </a:bodyPr>
           <a:p>
             <a:pPr indent="0" algn="l">
               <a:buNone/>
             </a:pPr>
-            <a:endParaRPr lang="en-US" sz="3070" b="0" u="none" strike="noStrike">
+            <a:endParaRPr lang="en-US" sz="3640" b="1" u="none" strike="noStrike">
               <a:solidFill>
                 <a:srgbClr val="FFFFFF"/>
               </a:solidFill>
@@ -1956,7 +1959,7 @@
       </p:sp>
       <p:sp>
         <p:nvSpPr>
-          <p:cNvPr id="73" name="PlaceHolder 2"/>
+          <p:cNvPr id="69" name="PlaceHolder 2"/>
           <p:cNvSpPr>
             <a:spLocks noGrp="1"/>
           </p:cNvSpPr>
@@ -1966,8 +1969,8 @@
         </p:nvSpPr>
         <p:spPr>
           <a:xfrm>
-            <a:off x="489600" y="1632600"/>
-            <a:ext cx="8164080" cy="4354200"/>
+            <a:off x="435240" y="1796040"/>
+            <a:ext cx="11320920" cy="4572000"/>
           </a:xfrm>
           <a:prstGeom prst="rect">
             <a:avLst/>
@@ -1988,9 +1991,9 @@
               </a:spcAft>
               <a:buNone/>
             </a:pPr>
-            <a:endParaRPr lang="en-US" sz="2420" b="0" u="none" strike="noStrike">
-              <a:solidFill>
-                <a:srgbClr val="666666"/>
+            <a:endParaRPr lang="en-US" sz="2900" b="1" u="none" strike="noStrike">
+              <a:solidFill>
+                <a:srgbClr val="2C3E50"/>
               </a:solidFill>
               <a:effectLst/>
               <a:uFillTx/>
@@ -2033,7 +2036,7 @@
         <p:txBody>
           <a:bodyPr/>
           <a:p>
-            <a:fld id="{CCD6770A-A617-4AA2-9F4C-45BD613F267D}" type="slidenum">
+            <a:fld id="{95B33EA6-4E88-4F01-8CD4-E6B9DD7856CF}" type="slidenum">
               <a:t>&lt;#&gt;</a:t>
             </a:fld>
           </a:p>
@@ -2070,7 +2073,7 @@
 
 <file path=ppt/slideLayouts/slideLayout13.xml><?xml version="1.0" encoding="utf-8"?>
 <p:sldLayout xmlns:a="http://schemas.openxmlformats.org/drawingml/2006/main" xmlns:p="http://schemas.openxmlformats.org/presentationml/2006/main" xmlns:r="http://schemas.openxmlformats.org/officeDocument/2006/relationships" xmlns:p14="http://schemas.microsoft.com/office/powerpoint/2010/main" xmlns:p15="http://schemas.microsoft.com/office/powerpoint/2012/main" xmlns:mc="http://schemas.openxmlformats.org/markup-compatibility/2006" type="title" preserve="1">
-  <p:cSld name="Inspiration">
+  <p:cSld name="Midnightblue">
     <p:spTree>
       <p:nvGrpSpPr>
         <p:cNvPr id="1" name=""/>
@@ -2087,7 +2090,7 @@
       </p:grpSpPr>
       <p:sp>
         <p:nvSpPr>
-          <p:cNvPr id="74" name="PlaceHolder 1"/>
+          <p:cNvPr id="70" name="PlaceHolder 1"/>
           <p:cNvSpPr>
             <a:spLocks noGrp="1"/>
           </p:cNvSpPr>
@@ -2097,8 +2100,50 @@
         </p:nvSpPr>
         <p:spPr>
           <a:xfrm>
-            <a:off x="489600" y="543960"/>
-            <a:ext cx="7837560" cy="762120"/>
+            <a:off x="435240" y="272880"/>
+            <a:ext cx="11320920" cy="869760"/>
+          </a:xfrm>
+          <a:prstGeom prst="rect">
+            <a:avLst/>
+          </a:prstGeom>
+          <a:noFill/>
+          <a:ln w="0">
+            <a:noFill/>
+          </a:ln>
+        </p:spPr>
+        <p:txBody>
+          <a:bodyPr lIns="0" tIns="0" rIns="0" bIns="0" anchor="ctr">
+            <a:noAutofit/>
+          </a:bodyPr>
+          <a:p>
+            <a:pPr indent="0" algn="l">
+              <a:buNone/>
+            </a:pPr>
+            <a:endParaRPr lang="en-US" sz="3640" b="1" u="none" strike="noStrike">
+              <a:solidFill>
+                <a:srgbClr val="FFFFFF"/>
+              </a:solidFill>
+              <a:effectLst/>
+              <a:uFillTx/>
+              <a:latin typeface="Times New Roman"/>
+            </a:endParaRPr>
+          </a:p>
+        </p:txBody>
+      </p:sp>
+      <p:sp>
+        <p:nvSpPr>
+          <p:cNvPr id="71" name="PlaceHolder 2"/>
+          <p:cNvSpPr>
+            <a:spLocks noGrp="1"/>
+          </p:cNvSpPr>
+          <p:nvPr>
+            <p:ph type="subTitle"/>
+          </p:nvPr>
+        </p:nvSpPr>
+        <p:spPr>
+          <a:xfrm>
+            <a:off x="435240" y="1796040"/>
+            <a:ext cx="11320920" cy="4572000"/>
           </a:xfrm>
           <a:prstGeom prst="rect">
             <a:avLst/>
@@ -2113,54 +2158,12 @@
             <a:spAutoFit/>
           </a:bodyPr>
           <a:p>
-            <a:pPr indent="0" algn="l">
-              <a:buNone/>
-            </a:pPr>
-            <a:endParaRPr lang="en-US" sz="3070" b="0" u="none" strike="noStrike">
-              <a:solidFill>
-                <a:srgbClr val="FFFFFF"/>
-              </a:solidFill>
-              <a:effectLst/>
-              <a:uFillTx/>
-              <a:latin typeface="Times New Roman"/>
-            </a:endParaRPr>
-          </a:p>
-        </p:txBody>
-      </p:sp>
-      <p:sp>
-        <p:nvSpPr>
-          <p:cNvPr id="75" name="PlaceHolder 2"/>
-          <p:cNvSpPr>
-            <a:spLocks noGrp="1"/>
-          </p:cNvSpPr>
-          <p:nvPr>
-            <p:ph type="subTitle"/>
-          </p:nvPr>
-        </p:nvSpPr>
-        <p:spPr>
-          <a:xfrm>
-            <a:off x="489600" y="1632600"/>
-            <a:ext cx="8164080" cy="4354200"/>
-          </a:xfrm>
-          <a:prstGeom prst="rect">
-            <a:avLst/>
-          </a:prstGeom>
-          <a:noFill/>
-          <a:ln w="0">
-            <a:noFill/>
-          </a:ln>
-        </p:spPr>
-        <p:txBody>
-          <a:bodyPr lIns="0" tIns="0" rIns="0" bIns="0" anchor="ctr">
-            <a:spAutoFit/>
-          </a:bodyPr>
-          <a:p>
             <a:pPr indent="0" algn="ctr">
               <a:buNone/>
             </a:pPr>
             <a:endParaRPr lang="en-US" sz="3200" b="0" u="none" strike="noStrike">
               <a:solidFill>
-                <a:srgbClr val="666666"/>
+                <a:srgbClr val="2C3E50"/>
               </a:solidFill>
               <a:effectLst/>
               <a:uFillTx/>
@@ -2203,7 +2206,7 @@
         <p:txBody>
           <a:bodyPr/>
           <a:p>
-            <a:fld id="{F873CB74-8E76-4761-AFA1-073113BCC317}" type="slidenum">
+            <a:fld id="{9BAE127D-8B99-4022-A653-2AF4A93238A6}" type="slidenum">
               <a:t>&lt;#&gt;</a:t>
             </a:fld>
           </a:p>
@@ -2834,7 +2837,7 @@
               </a:lnSpc>
               <a:buNone/>
             </a:pPr>
-            <a:fld id="{2C27411B-0C93-43AC-AAD4-D71F1E82C9BA}" type="slidenum">
+            <a:fld id="{724E887F-2E81-4988-8C41-06F3AD730967}" type="slidenum">
               <a:rPr lang="en-US" sz="1200" b="0" u="none" strike="noStrike">
                 <a:solidFill>
                   <a:schemeClr val="dk1">
@@ -3462,7 +3465,7 @@
               </a:lnSpc>
               <a:buNone/>
             </a:pPr>
-            <a:fld id="{4FFAC740-1190-483B-A2AF-D24741253617}" type="slidenum">
+            <a:fld id="{EDAA8B69-73FF-4F36-8856-99BB3D85DA9D}" type="slidenum">
               <a:rPr lang="en-US" sz="1200" b="0" u="none" strike="noStrike">
                 <a:solidFill>
                   <a:schemeClr val="dk1">
@@ -4090,7 +4093,7 @@
               </a:lnSpc>
               <a:buNone/>
             </a:pPr>
-            <a:fld id="{08DAC8B7-9254-415B-8C7B-CC4D9A17909B}" type="slidenum">
+            <a:fld id="{1A206386-2BFE-4D55-86E9-0FDB0E0DB556}" type="slidenum">
               <a:rPr lang="en-US" sz="1200" b="0" u="none" strike="noStrike">
                 <a:solidFill>
                   <a:schemeClr val="dk1">
@@ -4502,7 +4505,7 @@
               </a:lnSpc>
               <a:buNone/>
             </a:pPr>
-            <a:fld id="{3DE18A5E-0409-4880-8C8C-0FA3A80553A0}" type="slidenum">
+            <a:fld id="{B8F1DB23-FE4D-446B-A2F5-EBA031A6020C}" type="slidenum">
               <a:rPr lang="en-US" sz="1200" b="0" u="none" strike="noStrike">
                 <a:solidFill>
                   <a:schemeClr val="dk1">
@@ -5436,7 +5439,7 @@
               </a:lnSpc>
               <a:buNone/>
             </a:pPr>
-            <a:fld id="{3681601C-0AD5-4120-926E-69DA57088AFB}" type="slidenum">
+            <a:fld id="{679ECC8A-0818-4810-80AA-4C77E9176AED}" type="slidenum">
               <a:rPr lang="en-US" sz="1200" b="0" u="none" strike="noStrike">
                 <a:solidFill>
                   <a:schemeClr val="dk1">
@@ -6598,7 +6601,7 @@
               </a:lnSpc>
               <a:buNone/>
             </a:pPr>
-            <a:fld id="{E2C5B1A6-27EC-4E78-A849-6745B652ED8F}" type="slidenum">
+            <a:fld id="{78BEC43D-F1A6-4E21-AFC1-8112720219B7}" type="slidenum">
               <a:rPr lang="en-US" sz="1200" b="0" u="none" strike="noStrike">
                 <a:solidFill>
                   <a:schemeClr val="dk1">
@@ -6920,7 +6923,7 @@
               </a:lnSpc>
               <a:buNone/>
             </a:pPr>
-            <a:fld id="{2E7AEDB3-F2E7-4006-9F4E-A15E0C714F81}" type="slidenum">
+            <a:fld id="{E5AB1F2A-B057-4207-84B2-9B3672D658A3}" type="slidenum">
               <a:rPr lang="en-US" sz="1200" b="0" u="none" strike="noStrike">
                 <a:solidFill>
                   <a:schemeClr val="dk1">
@@ -7170,7 +7173,7 @@
               </a:lnSpc>
               <a:buNone/>
             </a:pPr>
-            <a:fld id="{FCFDEDDD-3632-4C19-888A-606DF91B4FC4}" type="slidenum">
+            <a:fld id="{9DB13987-0250-42F3-8773-F10E142D561E}" type="slidenum">
               <a:rPr lang="en-US" sz="1200" b="0" u="none" strike="noStrike">
                 <a:solidFill>
                   <a:schemeClr val="dk1">
@@ -7241,13 +7244,6 @@
 <file path=ppt/slideMasters/slideMaster12.xml><?xml version="1.0" encoding="utf-8"?>
 <p:sldMaster xmlns:a="http://schemas.openxmlformats.org/drawingml/2006/main" xmlns:p="http://schemas.openxmlformats.org/presentationml/2006/main" xmlns:r="http://schemas.openxmlformats.org/officeDocument/2006/relationships" xmlns:p14="http://schemas.microsoft.com/office/powerpoint/2010/main" xmlns:p15="http://schemas.microsoft.com/office/powerpoint/2012/main" xmlns:mc="http://schemas.openxmlformats.org/markup-compatibility/2006">
   <p:cSld>
-    <p:bg>
-      <p:bgPr>
-        <a:solidFill>
-          <a:srgbClr val="666666"/>
-        </a:solidFill>
-      </p:bgPr>
-    </p:bg>
     <p:spTree>
       <p:nvGrpSpPr>
         <p:cNvPr id="1" name=""/>
@@ -7269,21 +7265,17 @@
           <p:nvPr/>
         </p:nvSpPr>
         <p:spPr>
-          <a:xfrm rot="16200000">
-            <a:off x="-89280" y="760680"/>
-            <a:ext cx="1034280" cy="653040"/>
+          <a:xfrm>
+            <a:off x="0" y="6531120"/>
+            <a:ext cx="12191760" cy="326520"/>
           </a:xfrm>
-          <a:prstGeom prst="parallelogram">
-            <a:avLst>
-              <a:gd name="adj" fmla="val 41328"/>
-            </a:avLst>
+          <a:prstGeom prst="rect">
+            <a:avLst/>
           </a:prstGeom>
           <a:solidFill>
-            <a:srgbClr val="B5E77D">
-              <a:alpha val="49000"/>
-            </a:srgbClr>
+            <a:srgbClr val="2C3E50"/>
           </a:solidFill>
-          <a:ln w="10800">
+          <a:ln w="0">
             <a:noFill/>
           </a:ln>
         </p:spPr>
@@ -7294,14 +7286,14 @@
           <a:fontRef idx="minor"/>
         </p:style>
         <p:txBody>
-          <a:bodyPr lIns="90000" tIns="45000" rIns="90000" bIns="45000" anchor="ctr">
-            <a:noAutofit/>
+          <a:bodyPr wrap="none" lIns="0" tIns="0" rIns="0" bIns="0" anchor="t">
+            <a:spAutoFit/>
           </a:bodyPr>
           <a:p>
             <a:pPr/>
-            <a:endParaRPr lang="en-US" sz="1800" b="0" u="none" strike="noStrike">
-              <a:solidFill>
-                <a:srgbClr val="000000"/>
+            <a:endParaRPr lang="en-US" sz="1400" b="1" u="none" strike="noStrike">
+              <a:solidFill>
+                <a:srgbClr val="FFFFFF"/>
               </a:solidFill>
               <a:effectLst/>
               <a:uFillTx/>
@@ -7318,27 +7310,18 @@
         </p:nvSpPr>
         <p:spPr>
           <a:xfrm>
-            <a:off x="6930720" y="121680"/>
-            <a:ext cx="1089720" cy="448560"/>
+            <a:off x="0" y="0"/>
+            <a:ext cx="12191760" cy="1469520"/>
           </a:xfrm>
-          <a:prstGeom prst="parallelogram">
-            <a:avLst>
-              <a:gd name="adj" fmla="val 66375"/>
-            </a:avLst>
+          <a:prstGeom prst="rect">
+            <a:avLst/>
           </a:prstGeom>
           <a:solidFill>
-            <a:srgbClr val="81ACA6">
-              <a:alpha val="39000"/>
-            </a:srgbClr>
+            <a:srgbClr val="2C3E50"/>
           </a:solidFill>
-          <a:ln w="10800">
+          <a:ln w="0">
             <a:noFill/>
           </a:ln>
-          <a:effectLst>
-            <a:outerShdw dist="0" dir="0" rotWithShape="0">
-              <a:srgbClr val="B2B2B2"/>
-            </a:outerShdw>
-          </a:effectLst>
         </p:spPr>
         <p:style>
           <a:lnRef idx="0"/>
@@ -7347,14 +7330,14 @@
           <a:fontRef idx="minor"/>
         </p:style>
         <p:txBody>
-          <a:bodyPr lIns="90000" tIns="45000" rIns="90000" bIns="45000" anchor="ctr">
-            <a:noAutofit/>
+          <a:bodyPr wrap="none" lIns="0" tIns="0" rIns="0" bIns="0" anchor="t">
+            <a:spAutoFit/>
           </a:bodyPr>
           <a:p>
             <a:pPr/>
-            <a:endParaRPr lang="en-US" sz="1800" b="0" u="none" strike="noStrike">
-              <a:solidFill>
-                <a:srgbClr val="000000"/>
+            <a:endParaRPr lang="en-US" sz="1400" b="1" u="none" strike="noStrike">
+              <a:solidFill>
+                <a:srgbClr val="FFFFFF"/>
               </a:solidFill>
               <a:effectLst/>
               <a:uFillTx/>
@@ -7371,66 +7354,19 @@
         </p:nvSpPr>
         <p:spPr>
           <a:xfrm>
-            <a:off x="244800" y="217440"/>
-            <a:ext cx="8654040" cy="5878440"/>
+            <a:off x="11266200" y="6258960"/>
+            <a:ext cx="544320" cy="544320"/>
           </a:xfrm>
-          <a:prstGeom prst="rect">
+          <a:prstGeom prst="ellipse">
             <a:avLst/>
           </a:prstGeom>
           <a:solidFill>
-            <a:srgbClr val="FFFFFF"/>
+            <a:srgbClr val="1ABC9C"/>
           </a:solidFill>
           <a:ln w="0">
-            <a:noFill/>
-          </a:ln>
-          <a:effectLst>
-            <a:outerShdw dist="101823" dir="2700000" blurRad="38160" rotWithShape="0">
-              <a:srgbClr val="808080"/>
-            </a:outerShdw>
-          </a:effectLst>
-        </p:spPr>
-        <p:style>
-          <a:lnRef idx="0"/>
-          <a:fillRef idx="0"/>
-          <a:effectRef idx="0"/>
-          <a:fontRef idx="minor"/>
-        </p:style>
-        <p:txBody>
-          <a:bodyPr wrap="none" lIns="0" tIns="0" rIns="0" bIns="0" anchor="ctr">
-            <a:noAutofit/>
-          </a:bodyPr>
-          <a:p>
-            <a:pPr/>
-            <a:endParaRPr lang="en-US" sz="1400" b="0" u="none" strike="noStrike">
-              <a:solidFill>
-                <a:srgbClr val="EEEEEE"/>
-              </a:solidFill>
-              <a:effectLst/>
-              <a:uFillTx/>
-              <a:latin typeface="Times New Roman"/>
-            </a:endParaRPr>
-          </a:p>
-        </p:txBody>
-      </p:sp>
-      <p:sp>
-        <p:nvSpPr>
-          <p:cNvPr id="63" name=""/>
-          <p:cNvSpPr/>
-          <p:nvPr/>
-        </p:nvSpPr>
-        <p:spPr>
-          <a:xfrm>
-            <a:off x="7229160" y="196200"/>
-            <a:ext cx="821160" cy="1383480"/>
-          </a:xfrm>
-          <a:prstGeom prst="rect">
-            <a:avLst/>
-          </a:prstGeom>
-          <a:solidFill>
-            <a:srgbClr val="81ACA6"/>
-          </a:solidFill>
-          <a:ln w="38160">
-            <a:noFill/>
+            <a:solidFill>
+              <a:srgbClr val="1ABC9C"/>
+            </a:solidFill>
           </a:ln>
         </p:spPr>
         <p:style>
@@ -7440,14 +7376,14 @@
           <a:fontRef idx="minor"/>
         </p:style>
         <p:txBody>
-          <a:bodyPr lIns="90000" tIns="45000" rIns="90000" bIns="45000" anchor="ctr">
+          <a:bodyPr wrap="none" lIns="0" tIns="0" rIns="0" bIns="0" anchor="t">
             <a:spAutoFit/>
           </a:bodyPr>
           <a:p>
             <a:pPr/>
-            <a:endParaRPr lang="en-US" sz="1800" b="0" u="none" strike="noStrike">
-              <a:solidFill>
-                <a:srgbClr val="000000"/>
+            <a:endParaRPr lang="en-US" sz="1400" b="1" u="none" strike="noStrike">
+              <a:solidFill>
+                <a:srgbClr val="FFFFFF"/>
               </a:solidFill>
               <a:effectLst/>
               <a:uFillTx/>
@@ -7458,149 +7394,7 @@
       </p:sp>
       <p:sp>
         <p:nvSpPr>
-          <p:cNvPr id="64" name=""/>
-          <p:cNvSpPr/>
-          <p:nvPr/>
-        </p:nvSpPr>
-        <p:spPr>
-          <a:xfrm>
-            <a:off x="244800" y="570240"/>
-            <a:ext cx="8102160" cy="762120"/>
-          </a:xfrm>
-          <a:prstGeom prst="rect">
-            <a:avLst/>
-          </a:prstGeom>
-          <a:solidFill>
-            <a:srgbClr val="B5E77D"/>
-          </a:solidFill>
-          <a:ln w="38160">
-            <a:solidFill>
-              <a:srgbClr val="91D93F"/>
-            </a:solidFill>
-            <a:round/>
-          </a:ln>
-          <a:effectLst>
-            <a:outerShdw dist="17819" dir="2700000" blurRad="12600" rotWithShape="0">
-              <a:srgbClr val="B2B2B2">
-                <a:alpha val="43000"/>
-              </a:srgbClr>
-            </a:outerShdw>
-          </a:effectLst>
-        </p:spPr>
-        <p:style>
-          <a:lnRef idx="0"/>
-          <a:fillRef idx="0"/>
-          <a:effectRef idx="0"/>
-          <a:fontRef idx="minor"/>
-        </p:style>
-        <p:txBody>
-          <a:bodyPr lIns="90000" tIns="45000" rIns="90000" bIns="45000" anchor="ctr">
-            <a:spAutoFit/>
-          </a:bodyPr>
-          <a:p>
-            <a:pPr/>
-            <a:endParaRPr lang="en-US" sz="1800" b="0" u="none" strike="noStrike">
-              <a:solidFill>
-                <a:srgbClr val="000000"/>
-              </a:solidFill>
-              <a:effectLst/>
-              <a:uFillTx/>
-              <a:latin typeface="Arial"/>
-            </a:endParaRPr>
-          </a:p>
-        </p:txBody>
-      </p:sp>
-      <p:sp>
-        <p:nvSpPr>
-          <p:cNvPr id="65" name=""/>
-          <p:cNvSpPr/>
-          <p:nvPr/>
-        </p:nvSpPr>
-        <p:spPr>
-          <a:xfrm>
-            <a:off x="101160" y="570240"/>
-            <a:ext cx="225360" cy="762120"/>
-          </a:xfrm>
-          <a:prstGeom prst="rect">
-            <a:avLst/>
-          </a:prstGeom>
-          <a:solidFill>
-            <a:srgbClr val="B5E77D"/>
-          </a:solidFill>
-          <a:ln w="38160">
-            <a:noFill/>
-          </a:ln>
-        </p:spPr>
-        <p:style>
-          <a:lnRef idx="0"/>
-          <a:fillRef idx="0"/>
-          <a:effectRef idx="0"/>
-          <a:fontRef idx="minor"/>
-        </p:style>
-        <p:txBody>
-          <a:bodyPr lIns="90000" tIns="45000" rIns="90000" bIns="45000" anchor="ctr">
-            <a:spAutoFit/>
-          </a:bodyPr>
-          <a:p>
-            <a:pPr/>
-            <a:endParaRPr lang="en-US" sz="1800" b="0" u="none" strike="noStrike">
-              <a:solidFill>
-                <a:srgbClr val="000000"/>
-              </a:solidFill>
-              <a:effectLst/>
-              <a:uFillTx/>
-              <a:latin typeface="Arial"/>
-            </a:endParaRPr>
-          </a:p>
-        </p:txBody>
-      </p:sp>
-      <p:sp>
-        <p:nvSpPr>
-          <p:cNvPr id="66" name=""/>
-          <p:cNvSpPr/>
-          <p:nvPr/>
-        </p:nvSpPr>
-        <p:spPr>
-          <a:xfrm>
-            <a:off x="7229160" y="121680"/>
-            <a:ext cx="820800" cy="95760"/>
-          </a:xfrm>
-          <a:prstGeom prst="rect">
-            <a:avLst/>
-          </a:prstGeom>
-          <a:solidFill>
-            <a:srgbClr val="81ACA6"/>
-          </a:solidFill>
-          <a:ln w="38160">
-            <a:noFill/>
-          </a:ln>
-        </p:spPr>
-        <p:style>
-          <a:lnRef idx="0"/>
-          <a:fillRef idx="0"/>
-          <a:effectRef idx="0"/>
-          <a:fontRef idx="minor"/>
-        </p:style>
-        <p:txBody>
-          <a:bodyPr lIns="90000" tIns="45000" rIns="90000" bIns="45000" anchor="ctr">
-            <a:spAutoFit/>
-          </a:bodyPr>
-          <a:p>
-            <a:pPr/>
-            <a:endParaRPr lang="en-US" sz="1800" b="0" u="none" strike="noStrike">
-              <a:solidFill>
-                <a:srgbClr val="000000"/>
-              </a:solidFill>
-              <a:effectLst/>
-              <a:uFillTx/>
-              <a:latin typeface="Arial"/>
-            </a:endParaRPr>
-          </a:p>
-        </p:txBody>
-      </p:sp>
-      <p:sp>
-        <p:nvSpPr>
-          <p:cNvPr id="67" name="PlaceHolder 1"/>
+          <p:cNvPr id="63" name="PlaceHolder 1"/>
           <p:cNvSpPr>
             <a:spLocks noGrp="1"/>
           </p:cNvSpPr>
@@ -7610,8 +7404,8 @@
         </p:nvSpPr>
         <p:spPr>
           <a:xfrm>
-            <a:off x="489600" y="543960"/>
-            <a:ext cx="7837560" cy="762120"/>
+            <a:off x="435240" y="272880"/>
+            <a:ext cx="11320920" cy="869760"/>
           </a:xfrm>
           <a:prstGeom prst="rect">
             <a:avLst/>
@@ -7628,7 +7422,7 @@
           <a:lstStyle>
             <a:lvl1pPr indent="0" algn="l">
               <a:buNone/>
-              <a:defRPr lang="en-US" sz="3070" b="0" u="none" strike="noStrike">
+              <a:defRPr lang="en-US" sz="3640" b="1" u="none" strike="noStrike">
                 <a:solidFill>
                   <a:srgbClr val="FFFFFF"/>
                 </a:solidFill>
@@ -7643,7 +7437,7 @@
               <a:buNone/>
             </a:pPr>
             <a:r>
-              <a:rPr lang="en-US" sz="3070" b="0" u="none" strike="noStrike">
+              <a:rPr lang="en-US" sz="3640" b="1" u="none" strike="noStrike">
                 <a:solidFill>
                   <a:srgbClr val="FFFFFF"/>
                 </a:solidFill>
@@ -7653,7 +7447,7 @@
               </a:rPr>
               <a:t>Click to edit the title text format</a:t>
             </a:r>
-            <a:endParaRPr lang="en-US" sz="3070" b="0" u="none" strike="noStrike">
+            <a:endParaRPr lang="en-US" sz="3640" b="1" u="none" strike="noStrike">
               <a:solidFill>
                 <a:srgbClr val="FFFFFF"/>
               </a:solidFill>
@@ -7666,7 +7460,7 @@
       </p:sp>
       <p:sp>
         <p:nvSpPr>
-          <p:cNvPr id="68" name="PlaceHolder 2"/>
+          <p:cNvPr id="64" name="PlaceHolder 2"/>
           <p:cNvSpPr>
             <a:spLocks noGrp="1"/>
           </p:cNvSpPr>
@@ -7676,8 +7470,8 @@
         </p:nvSpPr>
         <p:spPr>
           <a:xfrm>
-            <a:off x="489600" y="1632600"/>
-            <a:ext cx="8164080" cy="4354200"/>
+            <a:off x="435240" y="1796040"/>
+            <a:ext cx="11320920" cy="4572000"/>
           </a:xfrm>
           <a:prstGeom prst="rect">
             <a:avLst/>
@@ -7701,14 +7495,14 @@
                 <a:spcPts val="1276"/>
               </a:spcAft>
               <a:buClr>
-                <a:srgbClr val="91D93F"/>
+                <a:srgbClr val="2C3E50"/>
               </a:buClr>
               <a:buSzPct val="45000"/>
               <a:buFont typeface="Wingdings" charset="2"/>
               <a:buChar char=""/>
-              <a:defRPr lang="en-US" sz="2420" b="0" u="none" strike="noStrike">
-                <a:solidFill>
-                  <a:srgbClr val="666666"/>
+              <a:defRPr lang="en-US" sz="2900" b="1" u="none" strike="noStrike">
+                <a:solidFill>
+                  <a:srgbClr val="2C3E50"/>
                 </a:solidFill>
                 <a:effectLst/>
                 <a:uFillTx/>
@@ -7717,17 +7511,17 @@
             </a:lvl1pPr>
             <a:lvl2pPr lvl="1" algn="l">
               <a:spcAft>
-                <a:spcPts val="1020"/>
+                <a:spcPts val="1026"/>
               </a:spcAft>
               <a:buClr>
-                <a:srgbClr val="91D93F"/>
+                <a:srgbClr val="2C3E50"/>
               </a:buClr>
               <a:buSzPct val="75000"/>
               <a:buFont typeface="Symbol" charset="2"/>
               <a:buChar char=""/>
-              <a:defRPr lang="en-US" sz="2920" b="0" u="none" strike="noStrike">
-                <a:solidFill>
-                  <a:srgbClr val="666666"/>
+              <a:defRPr lang="en-US" sz="2540" b="0" u="none" strike="noStrike">
+                <a:solidFill>
+                  <a:srgbClr val="2C3E50"/>
                 </a:solidFill>
                 <a:effectLst/>
                 <a:uFillTx/>
@@ -7736,17 +7530,17 @@
             </a:lvl2pPr>
             <a:lvl3pPr lvl="2" algn="l">
               <a:spcAft>
-                <a:spcPts val="763"/>
+                <a:spcPts val="765"/>
               </a:spcAft>
               <a:buClr>
-                <a:srgbClr val="91D93F"/>
+                <a:srgbClr val="2C3E50"/>
               </a:buClr>
               <a:buSzPct val="45000"/>
-              <a:buFont typeface="Wingdings 2" charset="2"/>
-              <a:buChar char=""/>
-              <a:defRPr lang="en-US" sz="3530" b="0" u="none" strike="noStrike">
-                <a:solidFill>
-                  <a:srgbClr val="666666"/>
+              <a:buFont typeface="Wingdings" charset="2"/>
+              <a:buChar char=""/>
+              <a:defRPr lang="en-US" sz="2180" b="0" u="none" strike="noStrike">
+                <a:solidFill>
+                  <a:srgbClr val="2C3E50"/>
                 </a:solidFill>
                 <a:effectLst/>
                 <a:uFillTx/>
@@ -7755,74 +7549,74 @@
             </a:lvl3pPr>
             <a:lvl4pPr lvl="3" algn="l">
               <a:spcAft>
-                <a:spcPts val="505"/>
+                <a:spcPts val="513"/>
               </a:spcAft>
               <a:buClr>
-                <a:srgbClr val="91D93F"/>
+                <a:srgbClr val="2C3E50"/>
+              </a:buClr>
+              <a:buSzPct val="75000"/>
+              <a:buFont typeface="Symbol" charset="2"/>
+              <a:buChar char=""/>
+              <a:defRPr lang="en-US" sz="1810" b="0" u="none" strike="noStrike">
+                <a:solidFill>
+                  <a:srgbClr val="2C3E50"/>
+                </a:solidFill>
+                <a:effectLst/>
+                <a:uFillTx/>
+                <a:latin typeface="Times New Roman"/>
+              </a:defRPr>
+            </a:lvl4pPr>
+            <a:lvl5pPr lvl="4" algn="l">
+              <a:spcAft>
+                <a:spcPts val="255"/>
+              </a:spcAft>
+              <a:buClr>
+                <a:srgbClr val="2C3E50"/>
               </a:buClr>
               <a:buSzPct val="45000"/>
               <a:buFont typeface="Wingdings" charset="2"/>
               <a:buChar char=""/>
-              <a:defRPr lang="en-US" sz="4270" b="0" u="none" strike="noStrike">
-                <a:solidFill>
-                  <a:srgbClr val="666666"/>
+              <a:defRPr lang="en-US" sz="2190" b="0" u="none" strike="noStrike">
+                <a:solidFill>
+                  <a:srgbClr val="2C3E50"/>
                 </a:solidFill>
                 <a:effectLst/>
                 <a:uFillTx/>
                 <a:latin typeface="Times New Roman"/>
               </a:defRPr>
-            </a:lvl4pPr>
-            <a:lvl5pPr lvl="4" algn="l">
+            </a:lvl5pPr>
+            <a:lvl6pPr lvl="5" algn="l">
               <a:spcAft>
-                <a:spcPts val="249"/>
+                <a:spcPts val="306"/>
               </a:spcAft>
               <a:buClr>
-                <a:srgbClr val="91D93F"/>
+                <a:srgbClr val="2C3E50"/>
               </a:buClr>
               <a:buSzPct val="45000"/>
               <a:buFont typeface="Wingdings" charset="2"/>
               <a:buChar char=""/>
-              <a:defRPr lang="en-US" sz="5170" b="0" u="none" strike="noStrike">
-                <a:solidFill>
-                  <a:srgbClr val="666666"/>
+              <a:defRPr lang="en-US" sz="2640" b="0" u="none" strike="noStrike">
+                <a:solidFill>
+                  <a:srgbClr val="2C3E50"/>
                 </a:solidFill>
                 <a:effectLst/>
                 <a:uFillTx/>
                 <a:latin typeface="Times New Roman"/>
               </a:defRPr>
-            </a:lvl5pPr>
-            <a:lvl6pPr lvl="5" algn="l">
+            </a:lvl6pPr>
+            <a:lvl7pPr lvl="6" algn="l">
               <a:spcAft>
-                <a:spcPts val="300"/>
+                <a:spcPts val="369"/>
               </a:spcAft>
               <a:buClr>
-                <a:srgbClr val="91D93F"/>
+                <a:srgbClr val="2C3E50"/>
               </a:buClr>
               <a:buSzPct val="45000"/>
               <a:buFont typeface="Wingdings" charset="2"/>
               <a:buChar char=""/>
-              <a:defRPr lang="en-US" sz="6250" b="0" u="none" strike="noStrike">
-                <a:solidFill>
-                  <a:srgbClr val="666666"/>
-                </a:solidFill>
-                <a:effectLst/>
-                <a:uFillTx/>
-                <a:latin typeface="Times New Roman"/>
-              </a:defRPr>
-            </a:lvl6pPr>
-            <a:lvl7pPr lvl="6" algn="l">
-              <a:spcAft>
-                <a:spcPts val="363"/>
-              </a:spcAft>
-              <a:buClr>
-                <a:srgbClr val="91D93F"/>
-              </a:buClr>
-              <a:buSzPct val="45000"/>
-              <a:buFont typeface="Wingdings" charset="2"/>
-              <a:buChar char=""/>
-              <a:defRPr lang="en-US" sz="7550" b="0" u="none" strike="noStrike">
-                <a:solidFill>
-                  <a:srgbClr val="666666"/>
+              <a:defRPr lang="en-US" sz="3200" b="0" u="none" strike="noStrike">
+                <a:solidFill>
+                  <a:srgbClr val="2C3E50"/>
                 </a:solidFill>
                 <a:effectLst/>
                 <a:uFillTx/>
@@ -7836,16 +7630,16 @@
                 <a:spcPts val="1276"/>
               </a:spcAft>
               <a:buClr>
-                <a:srgbClr val="91D93F"/>
+                <a:srgbClr val="2C3E50"/>
               </a:buClr>
               <a:buSzPct val="45000"/>
               <a:buFont typeface="Wingdings" charset="2"/>
               <a:buChar char=""/>
             </a:pPr>
             <a:r>
-              <a:rPr lang="en-US" sz="2420" b="0" u="none" strike="noStrike">
-                <a:solidFill>
-                  <a:srgbClr val="666666"/>
+              <a:rPr lang="en-US" sz="2900" b="1" u="none" strike="noStrike">
+                <a:solidFill>
+                  <a:srgbClr val="2C3E50"/>
                 </a:solidFill>
                 <a:effectLst/>
                 <a:uFillTx/>
@@ -7853,9 +7647,9 @@
               </a:rPr>
               <a:t>Click to edit the outline text format</a:t>
             </a:r>
-            <a:endParaRPr lang="en-US" sz="2420" b="0" u="none" strike="noStrike">
-              <a:solidFill>
-                <a:srgbClr val="666666"/>
+            <a:endParaRPr lang="en-US" sz="2900" b="1" u="none" strike="noStrike">
+              <a:solidFill>
+                <a:srgbClr val="2C3E50"/>
               </a:solidFill>
               <a:effectLst/>
               <a:uFillTx/>
@@ -7865,19 +7659,19 @@
           <a:p>
             <a:pPr marL="864000" lvl="1" indent="-324000" algn="l">
               <a:spcAft>
-                <a:spcPts val="1020"/>
+                <a:spcPts val="1026"/>
               </a:spcAft>
               <a:buClr>
-                <a:srgbClr val="91D93F"/>
+                <a:srgbClr val="2C3E50"/>
               </a:buClr>
               <a:buSzPct val="75000"/>
               <a:buFont typeface="Symbol" charset="2"/>
               <a:buChar char=""/>
             </a:pPr>
             <a:r>
-              <a:rPr lang="en-US" sz="2920" b="0" u="none" strike="noStrike">
-                <a:solidFill>
-                  <a:srgbClr val="666666"/>
+              <a:rPr lang="en-US" sz="2540" b="0" u="none" strike="noStrike">
+                <a:solidFill>
+                  <a:srgbClr val="2C3E50"/>
                 </a:solidFill>
                 <a:effectLst/>
                 <a:uFillTx/>
@@ -7885,9 +7679,9 @@
               </a:rPr>
               <a:t>Second Outline Level</a:t>
             </a:r>
-            <a:endParaRPr lang="en-US" sz="2920" b="0" u="none" strike="noStrike">
-              <a:solidFill>
-                <a:srgbClr val="666666"/>
+            <a:endParaRPr lang="en-US" sz="2540" b="0" u="none" strike="noStrike">
+              <a:solidFill>
+                <a:srgbClr val="2C3E50"/>
               </a:solidFill>
               <a:effectLst/>
               <a:uFillTx/>
@@ -7897,61 +7691,61 @@
           <a:p>
             <a:pPr marL="1296000" lvl="2" indent="-288000" algn="l">
               <a:spcAft>
-                <a:spcPts val="763"/>
+                <a:spcPts val="765"/>
               </a:spcAft>
               <a:buClr>
-                <a:srgbClr val="91D93F"/>
-              </a:buClr>
-              <a:buSzPct val="45000"/>
-              <a:buFont typeface="Wingdings 2" charset="2"/>
-              <a:buChar char=""/>
-            </a:pPr>
-            <a:r>
-              <a:rPr lang="en-US" sz="3530" b="0" u="none" strike="noStrike">
-                <a:solidFill>
-                  <a:srgbClr val="666666"/>
-                </a:solidFill>
-                <a:effectLst/>
-                <a:uFillTx/>
-                <a:latin typeface="Times New Roman"/>
-              </a:rPr>
-              <a:t>Third Outline Level</a:t>
-            </a:r>
-            <a:endParaRPr lang="en-US" sz="3530" b="0" u="none" strike="noStrike">
-              <a:solidFill>
-                <a:srgbClr val="666666"/>
-              </a:solidFill>
-              <a:effectLst/>
-              <a:uFillTx/>
-              <a:latin typeface="Times New Roman"/>
-            </a:endParaRPr>
-          </a:p>
-          <a:p>
-            <a:pPr marL="1728000" lvl="3" indent="-216000" algn="l">
-              <a:spcAft>
-                <a:spcPts val="505"/>
-              </a:spcAft>
-              <a:buClr>
-                <a:srgbClr val="91D93F"/>
+                <a:srgbClr val="2C3E50"/>
               </a:buClr>
               <a:buSzPct val="45000"/>
               <a:buFont typeface="Wingdings" charset="2"/>
               <a:buChar char=""/>
             </a:pPr>
             <a:r>
-              <a:rPr lang="en-US" sz="4270" b="0" u="none" strike="noStrike">
-                <a:solidFill>
-                  <a:srgbClr val="666666"/>
+              <a:rPr lang="en-US" sz="2180" b="0" u="none" strike="noStrike">
+                <a:solidFill>
+                  <a:srgbClr val="2C3E50"/>
                 </a:solidFill>
                 <a:effectLst/>
                 <a:uFillTx/>
                 <a:latin typeface="Times New Roman"/>
               </a:rPr>
+              <a:t>Third Outline Level</a:t>
+            </a:r>
+            <a:endParaRPr lang="en-US" sz="2180" b="0" u="none" strike="noStrike">
+              <a:solidFill>
+                <a:srgbClr val="2C3E50"/>
+              </a:solidFill>
+              <a:effectLst/>
+              <a:uFillTx/>
+              <a:latin typeface="Times New Roman"/>
+            </a:endParaRPr>
+          </a:p>
+          <a:p>
+            <a:pPr marL="1728000" lvl="3" indent="-216000" algn="l">
+              <a:spcAft>
+                <a:spcPts val="513"/>
+              </a:spcAft>
+              <a:buClr>
+                <a:srgbClr val="2C3E50"/>
+              </a:buClr>
+              <a:buSzPct val="75000"/>
+              <a:buFont typeface="Symbol" charset="2"/>
+              <a:buChar char=""/>
+            </a:pPr>
+            <a:r>
+              <a:rPr lang="en-US" sz="1810" b="0" u="none" strike="noStrike">
+                <a:solidFill>
+                  <a:srgbClr val="2C3E50"/>
+                </a:solidFill>
+                <a:effectLst/>
+                <a:uFillTx/>
+                <a:latin typeface="Times New Roman"/>
+              </a:rPr>
               <a:t>Fourth Outline Level</a:t>
             </a:r>
-            <a:endParaRPr lang="en-US" sz="4270" b="0" u="none" strike="noStrike">
-              <a:solidFill>
-                <a:srgbClr val="666666"/>
+            <a:endParaRPr lang="en-US" sz="1810" b="0" u="none" strike="noStrike">
+              <a:solidFill>
+                <a:srgbClr val="2C3E50"/>
               </a:solidFill>
               <a:effectLst/>
               <a:uFillTx/>
@@ -7961,19 +7755,19 @@
           <a:p>
             <a:pPr marL="2160000" lvl="4" indent="-216000" algn="l">
               <a:spcAft>
-                <a:spcPts val="249"/>
+                <a:spcPts val="255"/>
               </a:spcAft>
               <a:buClr>
-                <a:srgbClr val="91D93F"/>
+                <a:srgbClr val="2C3E50"/>
               </a:buClr>
               <a:buSzPct val="45000"/>
               <a:buFont typeface="Wingdings" charset="2"/>
               <a:buChar char=""/>
             </a:pPr>
             <a:r>
-              <a:rPr lang="en-US" sz="5170" b="0" u="none" strike="noStrike">
-                <a:solidFill>
-                  <a:srgbClr val="666666"/>
+              <a:rPr lang="en-US" sz="2190" b="0" u="none" strike="noStrike">
+                <a:solidFill>
+                  <a:srgbClr val="2C3E50"/>
                 </a:solidFill>
                 <a:effectLst/>
                 <a:uFillTx/>
@@ -7981,9 +7775,9 @@
               </a:rPr>
               <a:t>Fifth Outline Level</a:t>
             </a:r>
-            <a:endParaRPr lang="en-US" sz="5170" b="0" u="none" strike="noStrike">
-              <a:solidFill>
-                <a:srgbClr val="666666"/>
+            <a:endParaRPr lang="en-US" sz="2190" b="0" u="none" strike="noStrike">
+              <a:solidFill>
+                <a:srgbClr val="2C3E50"/>
               </a:solidFill>
               <a:effectLst/>
               <a:uFillTx/>
@@ -7993,19 +7787,19 @@
           <a:p>
             <a:pPr marL="2592000" lvl="5" indent="-216000" algn="l">
               <a:spcAft>
-                <a:spcPts val="300"/>
+                <a:spcPts val="306"/>
               </a:spcAft>
               <a:buClr>
-                <a:srgbClr val="91D93F"/>
+                <a:srgbClr val="2C3E50"/>
               </a:buClr>
               <a:buSzPct val="45000"/>
               <a:buFont typeface="Wingdings" charset="2"/>
               <a:buChar char=""/>
             </a:pPr>
             <a:r>
-              <a:rPr lang="en-US" sz="6250" b="0" u="none" strike="noStrike">
-                <a:solidFill>
-                  <a:srgbClr val="666666"/>
+              <a:rPr lang="en-US" sz="2640" b="0" u="none" strike="noStrike">
+                <a:solidFill>
+                  <a:srgbClr val="2C3E50"/>
                 </a:solidFill>
                 <a:effectLst/>
                 <a:uFillTx/>
@@ -8013,9 +7807,9 @@
               </a:rPr>
               <a:t>Sixth Outline Level</a:t>
             </a:r>
-            <a:endParaRPr lang="en-US" sz="6250" b="0" u="none" strike="noStrike">
-              <a:solidFill>
-                <a:srgbClr val="666666"/>
+            <a:endParaRPr lang="en-US" sz="2640" b="0" u="none" strike="noStrike">
+              <a:solidFill>
+                <a:srgbClr val="2C3E50"/>
               </a:solidFill>
               <a:effectLst/>
               <a:uFillTx/>
@@ -8025,19 +7819,19 @@
           <a:p>
             <a:pPr marL="3024000" lvl="6" indent="-216000" algn="l">
               <a:spcAft>
-                <a:spcPts val="363"/>
+                <a:spcPts val="369"/>
               </a:spcAft>
               <a:buClr>
-                <a:srgbClr val="91D93F"/>
+                <a:srgbClr val="2C3E50"/>
               </a:buClr>
               <a:buSzPct val="45000"/>
               <a:buFont typeface="Wingdings" charset="2"/>
               <a:buChar char=""/>
             </a:pPr>
             <a:r>
-              <a:rPr lang="en-US" sz="7550" b="0" u="none" strike="noStrike">
-                <a:solidFill>
-                  <a:srgbClr val="666666"/>
+              <a:rPr lang="en-US" sz="3200" b="0" u="none" strike="noStrike">
+                <a:solidFill>
+                  <a:srgbClr val="2C3E50"/>
                 </a:solidFill>
                 <a:effectLst/>
                 <a:uFillTx/>
@@ -8045,9 +7839,9 @@
               </a:rPr>
               <a:t>Seventh Outline Level</a:t>
             </a:r>
-            <a:endParaRPr lang="en-US" sz="7550" b="0" u="none" strike="noStrike">
-              <a:solidFill>
-                <a:srgbClr val="666666"/>
+            <a:endParaRPr lang="en-US" sz="3200" b="0" u="none" strike="noStrike">
+              <a:solidFill>
+                <a:srgbClr val="2C3E50"/>
               </a:solidFill>
               <a:effectLst/>
               <a:uFillTx/>
@@ -8058,7 +7852,7 @@
       </p:sp>
       <p:sp>
         <p:nvSpPr>
-          <p:cNvPr id="69" name="PlaceHolder 3"/>
+          <p:cNvPr id="65" name="PlaceHolder 3"/>
           <p:cNvSpPr>
             <a:spLocks noGrp="1"/>
           </p:cNvSpPr>
@@ -8068,14 +7862,14 @@
         </p:nvSpPr>
         <p:spPr>
           <a:xfrm>
-            <a:off x="457200" y="6246720"/>
-            <a:ext cx="2130120" cy="473040"/>
+            <a:off x="435240" y="6531120"/>
+            <a:ext cx="3483360" cy="326520"/>
           </a:xfrm>
           <a:prstGeom prst="rect">
             <a:avLst/>
           </a:prstGeom>
           <a:noFill/>
-          <a:ln w="0">
+          <a:ln w="72000">
             <a:noFill/>
           </a:ln>
         </p:spPr>
@@ -8086,9 +7880,9 @@
           <a:lstStyle>
             <a:lvl1pPr indent="0" algn="l">
               <a:buNone/>
-              <a:defRPr lang="en-US" sz="1400" b="0" u="none" strike="noStrike">
-                <a:solidFill>
-                  <a:srgbClr val="EEEEEE"/>
+              <a:defRPr lang="en-US" sz="1800" b="1" u="none" strike="noStrike">
+                <a:solidFill>
+                  <a:srgbClr val="FFFFFF"/>
                 </a:solidFill>
                 <a:effectLst/>
                 <a:uFillTx/>
@@ -8101,9 +7895,9 @@
               <a:buNone/>
             </a:pPr>
             <a:r>
-              <a:rPr lang="en-US" sz="1400" b="0" u="none" strike="noStrike">
-                <a:solidFill>
-                  <a:srgbClr val="EEEEEE"/>
+              <a:rPr lang="en-US" sz="1800" b="1" u="none" strike="noStrike">
+                <a:solidFill>
+                  <a:srgbClr val="FFFFFF"/>
                 </a:solidFill>
                 <a:effectLst/>
                 <a:uFillTx/>
@@ -8111,9 +7905,9 @@
               </a:rPr>
               <a:t>&lt;date/time&gt;</a:t>
             </a:r>
-            <a:endParaRPr lang="en-US" sz="1400" b="0" u="none" strike="noStrike">
-              <a:solidFill>
-                <a:srgbClr val="EEEEEE"/>
+            <a:endParaRPr lang="en-US" sz="1800" b="1" u="none" strike="noStrike">
+              <a:solidFill>
+                <a:srgbClr val="FFFFFF"/>
               </a:solidFill>
               <a:effectLst/>
               <a:uFillTx/>
@@ -8124,7 +7918,7 @@
       </p:sp>
       <p:sp>
         <p:nvSpPr>
-          <p:cNvPr id="70" name="PlaceHolder 4"/>
+          <p:cNvPr id="66" name="PlaceHolder 4"/>
           <p:cNvSpPr>
             <a:spLocks noGrp="1"/>
           </p:cNvSpPr>
@@ -8134,14 +7928,14 @@
         </p:nvSpPr>
         <p:spPr>
           <a:xfrm>
-            <a:off x="3126960" y="6246720"/>
-            <a:ext cx="2898360" cy="473040"/>
+            <a:off x="4136400" y="6531120"/>
+            <a:ext cx="3918960" cy="326520"/>
           </a:xfrm>
           <a:prstGeom prst="rect">
             <a:avLst/>
           </a:prstGeom>
           <a:noFill/>
-          <a:ln w="0">
+          <a:ln w="72000">
             <a:noFill/>
           </a:ln>
         </p:spPr>
@@ -8152,9 +7946,9 @@
           <a:lstStyle>
             <a:lvl1pPr indent="0" algn="ctr">
               <a:buNone/>
-              <a:defRPr lang="en-US" sz="1400" b="0" u="none" strike="noStrike">
-                <a:solidFill>
-                  <a:srgbClr val="EEEEEE"/>
+              <a:defRPr lang="en-US" sz="1800" b="1" u="none" strike="noStrike">
+                <a:solidFill>
+                  <a:srgbClr val="FFFFFF"/>
                 </a:solidFill>
                 <a:effectLst/>
                 <a:uFillTx/>
@@ -8167,9 +7961,9 @@
               <a:buNone/>
             </a:pPr>
             <a:r>
-              <a:rPr lang="en-US" sz="1400" b="0" u="none" strike="noStrike">
-                <a:solidFill>
-                  <a:srgbClr val="EEEEEE"/>
+              <a:rPr lang="en-US" sz="1800" b="1" u="none" strike="noStrike">
+                <a:solidFill>
+                  <a:srgbClr val="FFFFFF"/>
                 </a:solidFill>
                 <a:effectLst/>
                 <a:uFillTx/>
@@ -8177,9 +7971,9 @@
               </a:rPr>
               <a:t>&lt;footer&gt;</a:t>
             </a:r>
-            <a:endParaRPr lang="en-US" sz="1400" b="0" u="none" strike="noStrike">
-              <a:solidFill>
-                <a:srgbClr val="EEEEEE"/>
+            <a:endParaRPr lang="en-US" sz="1800" b="1" u="none" strike="noStrike">
+              <a:solidFill>
+                <a:srgbClr val="FFFFFF"/>
               </a:solidFill>
               <a:effectLst/>
               <a:uFillTx/>
@@ -8190,7 +7984,7 @@
       </p:sp>
       <p:sp>
         <p:nvSpPr>
-          <p:cNvPr id="71" name="PlaceHolder 5"/>
+          <p:cNvPr id="67" name="PlaceHolder 5"/>
           <p:cNvSpPr>
             <a:spLocks noGrp="1"/>
           </p:cNvSpPr>
@@ -8200,27 +7994,27 @@
         </p:nvSpPr>
         <p:spPr>
           <a:xfrm>
-            <a:off x="6555600" y="6246720"/>
-            <a:ext cx="2130120" cy="473040"/>
+            <a:off x="11103120" y="6258960"/>
+            <a:ext cx="870840" cy="544320"/>
           </a:xfrm>
           <a:prstGeom prst="rect">
             <a:avLst/>
           </a:prstGeom>
           <a:noFill/>
-          <a:ln w="0">
+          <a:ln w="72000">
             <a:noFill/>
           </a:ln>
         </p:spPr>
         <p:txBody>
-          <a:bodyPr lIns="0" tIns="0" rIns="0" bIns="0" anchor="t">
+          <a:bodyPr lIns="0" tIns="0" rIns="0" bIns="0" anchor="ctr">
             <a:spAutoFit/>
           </a:bodyPr>
           <a:lstStyle>
-            <a:lvl1pPr indent="0" algn="r">
-              <a:buNone/>
-              <a:defRPr lang="en-US" sz="1400" b="0" u="none" strike="noStrike">
-                <a:solidFill>
-                  <a:srgbClr val="EEEEEE"/>
+            <a:lvl1pPr indent="0" algn="ctr">
+              <a:buNone/>
+              <a:defRPr lang="en-US" sz="1800" b="1" u="none" strike="noStrike">
+                <a:solidFill>
+                  <a:srgbClr val="FFFFFF"/>
                 </a:solidFill>
                 <a:effectLst/>
                 <a:uFillTx/>
@@ -8229,13 +8023,13 @@
             </a:lvl1pPr>
           </a:lstStyle>
           <a:p>
-            <a:pPr indent="0" algn="r">
-              <a:buNone/>
-            </a:pPr>
-            <a:fld id="{1935FCDB-E11D-483F-9C44-F56EE998C9FD}" type="slidenum">
-              <a:rPr lang="en-US" sz="1400" b="0" u="none" strike="noStrike">
-                <a:solidFill>
-                  <a:srgbClr val="EEEEEE"/>
+            <a:pPr indent="0" algn="ctr">
+              <a:buNone/>
+            </a:pPr>
+            <a:fld id="{B83B2F42-BA73-4080-9A20-0FE472D7D8B8}" type="slidenum">
+              <a:rPr lang="en-US" sz="1800" b="1" u="none" strike="noStrike">
+                <a:solidFill>
+                  <a:srgbClr val="FFFFFF"/>
                 </a:solidFill>
                 <a:effectLst/>
                 <a:uFillTx/>
@@ -8243,9 +8037,9 @@
               </a:rPr>
               <a:t>&lt;number&gt;</a:t>
             </a:fld>
-            <a:endParaRPr lang="en-US" sz="1400" b="0" u="none" strike="noStrike">
-              <a:solidFill>
-                <a:srgbClr val="EEEEEE"/>
+            <a:endParaRPr lang="en-US" sz="1800" b="1" u="none" strike="noStrike">
+              <a:solidFill>
+                <a:srgbClr val="FFFFFF"/>
               </a:solidFill>
               <a:effectLst/>
               <a:uFillTx/>
@@ -8283,7 +8077,7 @@
       </p:grpSpPr>
       <p:sp>
         <p:nvSpPr>
-          <p:cNvPr id="76" name="PlaceHolder 1"/>
+          <p:cNvPr id="72" name="PlaceHolder 1"/>
           <p:cNvSpPr>
             <a:spLocks noGrp="1"/>
           </p:cNvSpPr>
@@ -8316,17 +8110,17 @@
               <a:buNone/>
             </a:pPr>
             <a:r>
-              <a:rPr lang="en-US" sz="4400" b="0" u="none" strike="noStrike">
-                <a:solidFill>
-                  <a:schemeClr val="dk1"/>
-                </a:solidFill>
-                <a:effectLst/>
-                <a:uFillTx/>
-                <a:latin typeface="Calibri"/>
-              </a:rPr>
-              <a:t>Digital Solutions</a:t>
-            </a:r>
-            <a:endParaRPr lang="en-US" sz="4400" b="0" u="none" strike="noStrike">
+              <a:rPr lang="en-US" sz="4400" b="1" u="none" strike="noStrike">
+                <a:solidFill>
+                  <a:srgbClr val="0D9488"/>
+                </a:solidFill>
+                <a:effectLst/>
+                <a:uFillTx/>
+                <a:latin typeface="Calibri"/>
+              </a:rPr>
+              <a:t>African Culture, Gender &amp; Modern Society</a:t>
+            </a:r>
+            <a:endParaRPr lang="en-US" sz="4400" b="1" u="none" strike="noStrike">
               <a:solidFill>
                 <a:srgbClr val="FFFFFF"/>
               </a:solidFill>
@@ -8339,7 +8133,7 @@
       </p:sp>
       <p:sp>
         <p:nvSpPr>
-          <p:cNvPr id="77" name="PlaceHolder 2"/>
+          <p:cNvPr id="73" name="PlaceHolder 2"/>
           <p:cNvSpPr>
             <a:spLocks noGrp="1"/>
           </p:cNvSpPr>
@@ -8370,7 +8164,7 @@
                 <a:spcPct val="100000"/>
               </a:lnSpc>
               <a:spcBef>
-                <a:spcPts val="641"/>
+                <a:spcPts val="479"/>
               </a:spcBef>
               <a:buNone/>
               <a:tabLst>
@@ -8378,21 +8172,52 @@
               </a:tabLst>
             </a:pPr>
             <a:r>
-              <a:rPr lang="en-US" sz="3200" b="0" u="none" strike="noStrike">
-                <a:solidFill>
-                  <a:schemeClr val="dk1">
-                    <a:tint val="75000"/>
-                  </a:schemeClr>
-                </a:solidFill>
-                <a:effectLst/>
-                <a:uFillTx/>
-                <a:latin typeface="Calibri"/>
-              </a:rPr>
-              <a:t>Modern Societal Challenges</a:t>
-            </a:r>
-            <a:endParaRPr lang="en-US" sz="3200" b="0" u="none" strike="noStrike">
-              <a:solidFill>
-                <a:srgbClr val="666666"/>
+              <a:rPr lang="en-US" sz="2400" b="0" u="none" strike="noStrike">
+                <a:solidFill>
+                  <a:srgbClr val="64748B"/>
+                </a:solidFill>
+                <a:effectLst/>
+                <a:uFillTx/>
+                <a:latin typeface="Calibri"/>
+              </a:rPr>
+              <a:t>Harmonizing Indigenous Values with Digital Transformation</a:t>
+            </a:r>
+            <a:endParaRPr lang="en-US" sz="2400" b="0" u="none" strike="noStrike">
+              <a:solidFill>
+                <a:srgbClr val="2C3E50"/>
+              </a:solidFill>
+              <a:effectLst/>
+              <a:uFillTx/>
+              <a:latin typeface="Times New Roman"/>
+            </a:endParaRPr>
+          </a:p>
+          <a:p>
+            <a:pPr indent="0" algn="ctr" defTabSz="457200">
+              <a:lnSpc>
+                <a:spcPct val="100000"/>
+              </a:lnSpc>
+              <a:spcBef>
+                <a:spcPts val="479"/>
+              </a:spcBef>
+              <a:buNone/>
+              <a:tabLst>
+                <a:tab pos="0" algn="l"/>
+              </a:tabLst>
+            </a:pPr>
+            <a:r>
+              <a:rPr lang="en-US" sz="2400" b="0" u="none" strike="noStrike">
+                <a:solidFill>
+                  <a:srgbClr val="64748B"/>
+                </a:solidFill>
+                <a:effectLst/>
+                <a:uFillTx/>
+                <a:latin typeface="Calibri"/>
+              </a:rPr>
+              <a:t>Ngei David Mumo | IGS 4202 Capstone</a:t>
+            </a:r>
+            <a:endParaRPr lang="en-US" sz="2400" b="0" u="none" strike="noStrike">
+              <a:solidFill>
+                <a:srgbClr val="2C3E50"/>
               </a:solidFill>
               <a:effectLst/>
               <a:uFillTx/>
@@ -8415,6 +8240,495 @@
 </file>
 
 <file path=ppt/slides/slide2.xml><?xml version="1.0" encoding="utf-8"?>
+<p:sld xmlns:a="http://schemas.openxmlformats.org/drawingml/2006/main" xmlns:p="http://schemas.openxmlformats.org/presentationml/2006/main" xmlns:r="http://schemas.openxmlformats.org/officeDocument/2006/relationships" xmlns:p14="http://schemas.microsoft.com/office/powerpoint/2010/main" xmlns:p15="http://schemas.microsoft.com/office/powerpoint/2012/main" xmlns:mc="http://schemas.openxmlformats.org/markup-compatibility/2006">
+  <p:cSld>
+    <p:spTree>
+      <p:nvGrpSpPr>
+        <p:cNvPr id="1" name=""/>
+        <p:cNvGrpSpPr/>
+        <p:nvPr/>
+      </p:nvGrpSpPr>
+      <p:grpSpPr>
+        <a:xfrm>
+          <a:off x="0" y="0"/>
+          <a:ext cx="0" cy="0"/>
+          <a:chOff x="0" y="0"/>
+          <a:chExt cx="0" cy="0"/>
+        </a:xfrm>
+      </p:grpSpPr>
+      <p:sp>
+        <p:nvSpPr>
+          <p:cNvPr id="74" name="PlaceHolder 1"/>
+          <p:cNvSpPr>
+            <a:spLocks noGrp="1"/>
+          </p:cNvSpPr>
+          <p:nvPr>
+            <p:ph type="title"/>
+          </p:nvPr>
+        </p:nvSpPr>
+        <p:spPr>
+          <a:xfrm>
+            <a:off x="457200" y="274680"/>
+            <a:ext cx="8229240" cy="1142640"/>
+          </a:xfrm>
+          <a:prstGeom prst="rect">
+            <a:avLst/>
+          </a:prstGeom>
+          <a:noFill/>
+          <a:ln w="0">
+            <a:noFill/>
+          </a:ln>
+        </p:spPr>
+        <p:txBody>
+          <a:bodyPr lIns="91440" tIns="45720" rIns="91440" bIns="45720" anchor="ctr">
+            <a:noAutofit/>
+          </a:bodyPr>
+          <a:p>
+            <a:pPr indent="0" algn="ctr" defTabSz="457200">
+              <a:lnSpc>
+                <a:spcPct val="100000"/>
+              </a:lnSpc>
+              <a:buNone/>
+            </a:pPr>
+            <a:r>
+              <a:rPr lang="en-US" sz="3200" b="1" u="none" strike="noStrike">
+                <a:solidFill>
+                  <a:srgbClr val="0F766E"/>
+                </a:solidFill>
+                <a:effectLst/>
+                <a:uFillTx/>
+                <a:latin typeface="Calibri"/>
+              </a:rPr>
+              <a:t>1. Cultural Heritage &amp; Communal Resilience in Kitui</a:t>
+            </a:r>
+            <a:endParaRPr lang="en-US" sz="3200" b="1" u="none" strike="noStrike">
+              <a:solidFill>
+                <a:srgbClr val="FFFFFF"/>
+              </a:solidFill>
+              <a:effectLst/>
+              <a:uFillTx/>
+              <a:latin typeface="Times New Roman"/>
+            </a:endParaRPr>
+          </a:p>
+        </p:txBody>
+      </p:sp>
+      <p:sp>
+        <p:nvSpPr>
+          <p:cNvPr id="75" name="PlaceHolder 2"/>
+          <p:cNvSpPr>
+            <a:spLocks noGrp="1"/>
+          </p:cNvSpPr>
+          <p:nvPr>
+            <p:ph/>
+          </p:nvPr>
+        </p:nvSpPr>
+        <p:spPr>
+          <a:xfrm>
+            <a:off x="457200" y="1600200"/>
+            <a:ext cx="8229240" cy="4525560"/>
+          </a:xfrm>
+          <a:prstGeom prst="rect">
+            <a:avLst/>
+          </a:prstGeom>
+          <a:noFill/>
+          <a:ln w="0">
+            <a:noFill/>
+          </a:ln>
+        </p:spPr>
+        <p:txBody>
+          <a:bodyPr lIns="91440" tIns="45720" rIns="91440" bIns="45720" anchor="t">
+            <a:noAutofit/>
+          </a:bodyPr>
+          <a:p>
+            <a:pPr marL="343080" indent="-343080" algn="l" defTabSz="457200">
+              <a:lnSpc>
+                <a:spcPct val="100000"/>
+              </a:lnSpc>
+              <a:spcBef>
+                <a:spcPts val="400"/>
+              </a:spcBef>
+              <a:spcAft>
+                <a:spcPts val="1400"/>
+              </a:spcAft>
+              <a:buClr>
+                <a:srgbClr val="1E293B"/>
+              </a:buClr>
+              <a:buFont typeface="Arial"/>
+              <a:buChar char="•"/>
+            </a:pPr>
+            <a:r>
+              <a:rPr lang="en-US" sz="2000" b="0" u="none" strike="noStrike">
+                <a:solidFill>
+                  <a:srgbClr val="1E293B"/>
+                </a:solidFill>
+                <a:effectLst/>
+                <a:uFillTx/>
+                <a:latin typeface="Calibri"/>
+              </a:rPr>
+              <a:t>Indigenous Akamba society thrives on collective labor (Mwethya), shared harvests, and mutual accountability.</a:t>
+            </a:r>
+            <a:endParaRPr lang="en-US" sz="2000" b="1" u="none" strike="noStrike">
+              <a:solidFill>
+                <a:srgbClr val="2C3E50"/>
+              </a:solidFill>
+              <a:effectLst/>
+              <a:uFillTx/>
+              <a:latin typeface="Times New Roman"/>
+            </a:endParaRPr>
+          </a:p>
+          <a:p>
+            <a:pPr marL="343080" indent="-343080" algn="l" defTabSz="457200">
+              <a:lnSpc>
+                <a:spcPct val="100000"/>
+              </a:lnSpc>
+              <a:spcBef>
+                <a:spcPts val="400"/>
+              </a:spcBef>
+              <a:spcAft>
+                <a:spcPts val="1400"/>
+              </a:spcAft>
+              <a:buClr>
+                <a:srgbClr val="1E293B"/>
+              </a:buClr>
+              <a:buFont typeface="Arial"/>
+              <a:buChar char="•"/>
+            </a:pPr>
+            <a:r>
+              <a:rPr lang="en-US" sz="2000" b="0" u="none" strike="noStrike">
+                <a:solidFill>
+                  <a:srgbClr val="1E293B"/>
+                </a:solidFill>
+                <a:effectLst/>
+                <a:uFillTx/>
+                <a:latin typeface="Calibri"/>
+              </a:rPr>
+              <a:t>Agricultural cycles of rain and drought teach generational lessons in preparation, endurance, and resource sharing.</a:t>
+            </a:r>
+            <a:endParaRPr lang="en-US" sz="2000" b="1" u="none" strike="noStrike">
+              <a:solidFill>
+                <a:srgbClr val="2C3E50"/>
+              </a:solidFill>
+              <a:effectLst/>
+              <a:uFillTx/>
+              <a:latin typeface="Times New Roman"/>
+            </a:endParaRPr>
+          </a:p>
+          <a:p>
+            <a:pPr marL="343080" indent="-343080" algn="l" defTabSz="457200">
+              <a:lnSpc>
+                <a:spcPct val="100000"/>
+              </a:lnSpc>
+              <a:spcBef>
+                <a:spcPts val="400"/>
+              </a:spcBef>
+              <a:spcAft>
+                <a:spcPts val="1400"/>
+              </a:spcAft>
+              <a:buClr>
+                <a:srgbClr val="1E293B"/>
+              </a:buClr>
+              <a:buFont typeface="Arial"/>
+              <a:buChar char="•"/>
+            </a:pPr>
+            <a:r>
+              <a:rPr lang="en-US" sz="2000" b="0" u="none" strike="noStrike">
+                <a:solidFill>
+                  <a:srgbClr val="1E293B"/>
+                </a:solidFill>
+                <a:effectLst/>
+                <a:uFillTx/>
+                <a:latin typeface="Calibri"/>
+              </a:rPr>
+              <a:t>Extended and blended family structures foster deep social security, respect for elders, and sibling mentorship.</a:t>
+            </a:r>
+            <a:endParaRPr lang="en-US" sz="2000" b="1" u="none" strike="noStrike">
+              <a:solidFill>
+                <a:srgbClr val="2C3E50"/>
+              </a:solidFill>
+              <a:effectLst/>
+              <a:uFillTx/>
+              <a:latin typeface="Times New Roman"/>
+            </a:endParaRPr>
+          </a:p>
+        </p:txBody>
+      </p:sp>
+    </p:spTree>
+  </p:cSld>
+  <mc:AlternateContent>
+    <mc:Choice Requires="p14">
+      <p:transition spd="slow" p14:dur="2000"/>
+    </mc:Choice>
+    <mc:Fallback>
+      <p:transition spd="slow"/>
+    </mc:Fallback>
+  </mc:AlternateContent>
+</p:sld>
+</file>
+
+<file path=ppt/slides/slide3.xml><?xml version="1.0" encoding="utf-8"?>
+<p:sld xmlns:a="http://schemas.openxmlformats.org/drawingml/2006/main" xmlns:p="http://schemas.openxmlformats.org/presentationml/2006/main" xmlns:r="http://schemas.openxmlformats.org/officeDocument/2006/relationships" xmlns:p14="http://schemas.microsoft.com/office/powerpoint/2010/main" xmlns:p15="http://schemas.microsoft.com/office/powerpoint/2012/main" xmlns:mc="http://schemas.openxmlformats.org/markup-compatibility/2006">
+  <p:cSld>
+    <p:spTree>
+      <p:nvGrpSpPr>
+        <p:cNvPr id="1" name=""/>
+        <p:cNvGrpSpPr/>
+        <p:nvPr/>
+      </p:nvGrpSpPr>
+      <p:grpSpPr>
+        <a:xfrm>
+          <a:off x="0" y="0"/>
+          <a:ext cx="0" cy="0"/>
+          <a:chOff x="0" y="0"/>
+          <a:chExt cx="0" cy="0"/>
+        </a:xfrm>
+      </p:grpSpPr>
+      <p:sp>
+        <p:nvSpPr>
+          <p:cNvPr id="76" name="PlaceHolder 1"/>
+          <p:cNvSpPr>
+            <a:spLocks noGrp="1"/>
+          </p:cNvSpPr>
+          <p:nvPr>
+            <p:ph type="title"/>
+          </p:nvPr>
+        </p:nvSpPr>
+        <p:spPr>
+          <a:xfrm>
+            <a:off x="457200" y="274680"/>
+            <a:ext cx="8229240" cy="1142640"/>
+          </a:xfrm>
+          <a:prstGeom prst="rect">
+            <a:avLst/>
+          </a:prstGeom>
+          <a:noFill/>
+          <a:ln w="0">
+            <a:noFill/>
+          </a:ln>
+        </p:spPr>
+        <p:txBody>
+          <a:bodyPr lIns="91440" tIns="45720" rIns="91440" bIns="45720" anchor="ctr">
+            <a:noAutofit/>
+          </a:bodyPr>
+          <a:p>
+            <a:pPr indent="0" algn="ctr" defTabSz="457200">
+              <a:lnSpc>
+                <a:spcPct val="100000"/>
+              </a:lnSpc>
+              <a:buNone/>
+            </a:pPr>
+            <a:r>
+              <a:rPr lang="en-US" sz="3200" b="1" u="none" strike="noStrike">
+                <a:solidFill>
+                  <a:srgbClr val="0F766E"/>
+                </a:solidFill>
+                <a:effectLst/>
+                <a:uFillTx/>
+                <a:latin typeface="Calibri"/>
+              </a:rPr>
+              <a:t>2. Gender Awareness: From Domestic Burden to STEM Equity</a:t>
+            </a:r>
+            <a:endParaRPr lang="en-US" sz="3200" b="1" u="none" strike="noStrike">
+              <a:solidFill>
+                <a:srgbClr val="FFFFFF"/>
+              </a:solidFill>
+              <a:effectLst/>
+              <a:uFillTx/>
+              <a:latin typeface="Times New Roman"/>
+            </a:endParaRPr>
+          </a:p>
+        </p:txBody>
+      </p:sp>
+      <p:sp>
+        <p:nvSpPr>
+          <p:cNvPr id="77" name="PlaceHolder 2"/>
+          <p:cNvSpPr>
+            <a:spLocks noGrp="1"/>
+          </p:cNvSpPr>
+          <p:nvPr>
+            <p:ph/>
+          </p:nvPr>
+        </p:nvSpPr>
+        <p:spPr>
+          <a:xfrm>
+            <a:off x="457200" y="1600200"/>
+            <a:ext cx="8229240" cy="4525560"/>
+          </a:xfrm>
+          <a:prstGeom prst="rect">
+            <a:avLst/>
+          </a:prstGeom>
+          <a:noFill/>
+          <a:ln w="0">
+            <a:noFill/>
+          </a:ln>
+        </p:spPr>
+        <p:txBody>
+          <a:bodyPr lIns="91440" tIns="45720" rIns="91440" bIns="45720" anchor="t">
+            <a:noAutofit/>
+          </a:bodyPr>
+          <a:p>
+            <a:pPr marL="343080" indent="-343080" algn="l" defTabSz="457200">
+              <a:lnSpc>
+                <a:spcPct val="100000"/>
+              </a:lnSpc>
+              <a:spcBef>
+                <a:spcPts val="400"/>
+              </a:spcBef>
+              <a:spcAft>
+                <a:spcPts val="1400"/>
+              </a:spcAft>
+              <a:buClr>
+                <a:srgbClr val="1E293B"/>
+              </a:buClr>
+              <a:buFont typeface="Arial"/>
+              <a:buChar char="•"/>
+            </a:pPr>
+            <a:r>
+              <a:rPr lang="en-US" sz="2000" b="0" u="none" strike="noStrike">
+                <a:solidFill>
+                  <a:srgbClr val="1E293B"/>
+                </a:solidFill>
+                <a:effectLst/>
+                <a:uFillTx/>
+                <a:latin typeface="Calibri"/>
+              </a:rPr>
+              <a:t>Traditional rural divisions of labor often place heavy domestic chores (water fetching, firewood) on women and youth.</a:t>
+            </a:r>
+            <a:endParaRPr lang="en-US" sz="2000" b="1" u="none" strike="noStrike">
+              <a:solidFill>
+                <a:srgbClr val="2C3E50"/>
+              </a:solidFill>
+              <a:effectLst/>
+              <a:uFillTx/>
+              <a:latin typeface="Times New Roman"/>
+            </a:endParaRPr>
+          </a:p>
+          <a:p>
+            <a:pPr marL="343080" indent="-343080" algn="l" defTabSz="457200">
+              <a:lnSpc>
+                <a:spcPct val="100000"/>
+              </a:lnSpc>
+              <a:spcBef>
+                <a:spcPts val="400"/>
+              </a:spcBef>
+              <a:spcAft>
+                <a:spcPts val="1400"/>
+              </a:spcAft>
+              <a:buClr>
+                <a:srgbClr val="1E293B"/>
+              </a:buClr>
+              <a:buFont typeface="Arial"/>
+              <a:buChar char="•"/>
+            </a:pPr>
+            <a:r>
+              <a:rPr lang="en-US" sz="2000" b="0" u="none" strike="noStrike">
+                <a:solidFill>
+                  <a:srgbClr val="1E293B"/>
+                </a:solidFill>
+                <a:effectLst/>
+                <a:uFillTx/>
+                <a:latin typeface="Calibri"/>
+              </a:rPr>
+              <a:t>Historical barriers limited female representation in technical sciences and computing.</a:t>
+            </a:r>
+            <a:endParaRPr lang="en-US" sz="2000" b="1" u="none" strike="noStrike">
+              <a:solidFill>
+                <a:srgbClr val="2C3E50"/>
+              </a:solidFill>
+              <a:effectLst/>
+              <a:uFillTx/>
+              <a:latin typeface="Times New Roman"/>
+            </a:endParaRPr>
+          </a:p>
+          <a:p>
+            <a:pPr marL="343080" indent="-343080" algn="l" defTabSz="457200">
+              <a:lnSpc>
+                <a:spcPct val="100000"/>
+              </a:lnSpc>
+              <a:spcBef>
+                <a:spcPts val="400"/>
+              </a:spcBef>
+              <a:spcAft>
+                <a:spcPts val="1400"/>
+              </a:spcAft>
+              <a:buClr>
+                <a:srgbClr val="1E293B"/>
+              </a:buClr>
+              <a:buFont typeface="Arial"/>
+              <a:buChar char="•"/>
+            </a:pPr>
+            <a:r>
+              <a:rPr lang="en-US" sz="2000" b="0" u="none" strike="noStrike">
+                <a:solidFill>
+                  <a:srgbClr val="1E293B"/>
+                </a:solidFill>
+                <a:effectLst/>
+                <a:uFillTx/>
+                <a:latin typeface="Calibri"/>
+              </a:rPr>
+              <a:t>Modern Imperative: Harmonizing traditional communal support with gender-inclusive STEM education.</a:t>
+            </a:r>
+            <a:endParaRPr lang="en-US" sz="2000" b="1" u="none" strike="noStrike">
+              <a:solidFill>
+                <a:srgbClr val="2C3E50"/>
+              </a:solidFill>
+              <a:effectLst/>
+              <a:uFillTx/>
+              <a:latin typeface="Times New Roman"/>
+            </a:endParaRPr>
+          </a:p>
+          <a:p>
+            <a:pPr marL="343080" indent="-343080" algn="l" defTabSz="457200">
+              <a:lnSpc>
+                <a:spcPct val="100000"/>
+              </a:lnSpc>
+              <a:spcBef>
+                <a:spcPts val="400"/>
+              </a:spcBef>
+              <a:spcAft>
+                <a:spcPts val="1400"/>
+              </a:spcAft>
+              <a:buClr>
+                <a:srgbClr val="1E293B"/>
+              </a:buClr>
+              <a:buFont typeface="Arial"/>
+              <a:buChar char="•"/>
+            </a:pPr>
+            <a:r>
+              <a:rPr lang="en-US" sz="2000" b="0" u="none" strike="noStrike">
+                <a:solidFill>
+                  <a:srgbClr val="1E293B"/>
+                </a:solidFill>
+                <a:effectLst/>
+                <a:uFillTx/>
+                <a:latin typeface="Calibri"/>
+              </a:rPr>
+              <a:t>Empowering both young women and men in coding, data science (DSAIC), and leadership multiplies community innovation.</a:t>
+            </a:r>
+            <a:endParaRPr lang="en-US" sz="2000" b="1" u="none" strike="noStrike">
+              <a:solidFill>
+                <a:srgbClr val="2C3E50"/>
+              </a:solidFill>
+              <a:effectLst/>
+              <a:uFillTx/>
+              <a:latin typeface="Times New Roman"/>
+            </a:endParaRPr>
+          </a:p>
+        </p:txBody>
+      </p:sp>
+    </p:spTree>
+  </p:cSld>
+  <mc:AlternateContent>
+    <mc:Choice Requires="p14">
+      <p:transition spd="slow" p14:dur="2000"/>
+    </mc:Choice>
+    <mc:Fallback>
+      <p:transition spd="slow"/>
+    </mc:Fallback>
+  </mc:AlternateContent>
+</p:sld>
+</file>
+
+<file path=ppt/slides/slide4.xml><?xml version="1.0" encoding="utf-8"?>
 <p:sld xmlns:a="http://schemas.openxmlformats.org/drawingml/2006/main" xmlns:p="http://schemas.openxmlformats.org/presentationml/2006/main" xmlns:r="http://schemas.openxmlformats.org/officeDocument/2006/relationships" xmlns:p14="http://schemas.microsoft.com/office/powerpoint/2010/main" xmlns:p15="http://schemas.microsoft.com/office/powerpoint/2012/main" xmlns:mc="http://schemas.openxmlformats.org/markup-compatibility/2006">
   <p:cSld>
     <p:spTree>
@@ -8466,17 +8780,17 @@
               <a:buNone/>
             </a:pPr>
             <a:r>
-              <a:rPr lang="en-US" sz="4400" b="0" u="none" strike="noStrike">
-                <a:solidFill>
-                  <a:schemeClr val="dk1"/>
-                </a:solidFill>
-                <a:effectLst/>
-                <a:uFillTx/>
-                <a:latin typeface="Calibri"/>
-              </a:rPr>
-              <a:t>Urbanization &amp; Logistics</a:t>
-            </a:r>
-            <a:endParaRPr lang="en-US" sz="4400" b="0" u="none" strike="noStrike">
+              <a:rPr lang="en-US" sz="3200" b="1" u="none" strike="noStrike">
+                <a:solidFill>
+                  <a:srgbClr val="0F766E"/>
+                </a:solidFill>
+                <a:effectLst/>
+                <a:uFillTx/>
+                <a:latin typeface="Calibri"/>
+              </a:rPr>
+              <a:t>3. Modern Societal Challenge I: Youth Unemployment</a:t>
+            </a:r>
+            <a:endParaRPr lang="en-US" sz="3200" b="1" u="none" strike="noStrike">
               <a:solidFill>
                 <a:srgbClr val="FFFFFF"/>
               </a:solidFill>
@@ -8520,28 +8834,31 @@
                 <a:spcPct val="100000"/>
               </a:lnSpc>
               <a:spcBef>
-                <a:spcPts val="641"/>
-              </a:spcBef>
-              <a:buClr>
-                <a:srgbClr val="000000"/>
+                <a:spcPts val="400"/>
+              </a:spcBef>
+              <a:spcAft>
+                <a:spcPts val="1400"/>
+              </a:spcAft>
+              <a:buClr>
+                <a:srgbClr val="1E293B"/>
               </a:buClr>
               <a:buFont typeface="Arial"/>
               <a:buChar char="•"/>
             </a:pPr>
             <a:r>
-              <a:rPr lang="en-US" sz="3200" b="0" u="none" strike="noStrike">
-                <a:solidFill>
-                  <a:schemeClr val="dk1"/>
-                </a:solidFill>
-                <a:effectLst/>
-                <a:uFillTx/>
-                <a:latin typeface="Calibri"/>
-              </a:rPr>
-              <a:t>Rapid growth of African urban centers</a:t>
-            </a:r>
-            <a:endParaRPr lang="en-US" sz="3200" b="0" u="none" strike="noStrike">
-              <a:solidFill>
-                <a:srgbClr val="666666"/>
+              <a:rPr lang="en-US" sz="2000" b="0" u="none" strike="noStrike">
+                <a:solidFill>
+                  <a:srgbClr val="1E293B"/>
+                </a:solidFill>
+                <a:effectLst/>
+                <a:uFillTx/>
+                <a:latin typeface="Calibri"/>
+              </a:rPr>
+              <a:t>Thousands of Kenyan graduates enter a constrained job market annually.</a:t>
+            </a:r>
+            <a:endParaRPr lang="en-US" sz="2000" b="1" u="none" strike="noStrike">
+              <a:solidFill>
+                <a:srgbClr val="2C3E50"/>
               </a:solidFill>
               <a:effectLst/>
               <a:uFillTx/>
@@ -8554,28 +8871,31 @@
                 <a:spcPct val="100000"/>
               </a:lnSpc>
               <a:spcBef>
-                <a:spcPts val="641"/>
-              </a:spcBef>
-              <a:buClr>
-                <a:srgbClr val="000000"/>
+                <a:spcPts val="400"/>
+              </a:spcBef>
+              <a:spcAft>
+                <a:spcPts val="1400"/>
+              </a:spcAft>
+              <a:buClr>
+                <a:srgbClr val="1E293B"/>
               </a:buClr>
               <a:buFont typeface="Arial"/>
               <a:buChar char="•"/>
             </a:pPr>
             <a:r>
-              <a:rPr lang="en-US" sz="3200" b="0" u="none" strike="noStrike">
-                <a:solidFill>
-                  <a:schemeClr val="dk1"/>
-                </a:solidFill>
-                <a:effectLst/>
-                <a:uFillTx/>
-                <a:latin typeface="Calibri"/>
-              </a:rPr>
-              <a:t>The necessity for optimized logistical routing (TSP)</a:t>
-            </a:r>
-            <a:endParaRPr lang="en-US" sz="3200" b="0" u="none" strike="noStrike">
-              <a:solidFill>
-                <a:srgbClr val="666666"/>
+              <a:rPr lang="en-US" sz="2000" b="0" u="none" strike="noStrike">
+                <a:solidFill>
+                  <a:srgbClr val="1E293B"/>
+                </a:solidFill>
+                <a:effectLst/>
+                <a:uFillTx/>
+                <a:latin typeface="Calibri"/>
+              </a:rPr>
+              <a:t>Solution: Shifting from passive degree acquisition to active problem-solving via hackathons and open-source projects.</a:t>
+            </a:r>
+            <a:endParaRPr lang="en-US" sz="2000" b="1" u="none" strike="noStrike">
+              <a:solidFill>
+                <a:srgbClr val="2C3E50"/>
               </a:solidFill>
               <a:effectLst/>
               <a:uFillTx/>
@@ -8588,28 +8908,31 @@
                 <a:spcPct val="100000"/>
               </a:lnSpc>
               <a:spcBef>
-                <a:spcPts val="641"/>
-              </a:spcBef>
-              <a:buClr>
-                <a:srgbClr val="000000"/>
+                <a:spcPts val="400"/>
+              </a:spcBef>
+              <a:spcAft>
+                <a:spcPts val="1400"/>
+              </a:spcAft>
+              <a:buClr>
+                <a:srgbClr val="1E293B"/>
               </a:buClr>
               <a:buFont typeface="Arial"/>
               <a:buChar char="•"/>
             </a:pPr>
             <a:r>
-              <a:rPr lang="en-US" sz="3200" b="0" u="none" strike="noStrike">
-                <a:solidFill>
-                  <a:schemeClr val="dk1"/>
-                </a:solidFill>
-                <a:effectLst/>
-                <a:uFillTx/>
-                <a:latin typeface="Calibri"/>
-              </a:rPr>
-              <a:t>Environmental challenges of poor waste management</a:t>
-            </a:r>
-            <a:endParaRPr lang="en-US" sz="3200" b="0" u="none" strike="noStrike">
-              <a:solidFill>
-                <a:srgbClr val="666666"/>
+              <a:rPr lang="en-US" sz="2000" b="0" u="none" strike="noStrike">
+                <a:solidFill>
+                  <a:srgbClr val="1E293B"/>
+                </a:solidFill>
+                <a:effectLst/>
+                <a:uFillTx/>
+                <a:latin typeface="Calibri"/>
+              </a:rPr>
+              <a:t>Leveraging software engineering and IT consultancy to create self-employment and digital startups.</a:t>
+            </a:r>
+            <a:endParaRPr lang="en-US" sz="2000" b="1" u="none" strike="noStrike">
+              <a:solidFill>
+                <a:srgbClr val="2C3E50"/>
               </a:solidFill>
               <a:effectLst/>
               <a:uFillTx/>
@@ -8631,7 +8954,7 @@
 </p:sld>
 </file>
 
-<file path=ppt/slides/slide3.xml><?xml version="1.0" encoding="utf-8"?>
+<file path=ppt/slides/slide5.xml><?xml version="1.0" encoding="utf-8"?>
 <p:sld xmlns:a="http://schemas.openxmlformats.org/drawingml/2006/main" xmlns:p="http://schemas.openxmlformats.org/presentationml/2006/main" xmlns:r="http://schemas.openxmlformats.org/officeDocument/2006/relationships" xmlns:p14="http://schemas.microsoft.com/office/powerpoint/2010/main" xmlns:p15="http://schemas.microsoft.com/office/powerpoint/2012/main" xmlns:mc="http://schemas.openxmlformats.org/markup-compatibility/2006">
   <p:cSld>
     <p:spTree>
@@ -8683,17 +9006,17 @@
               <a:buNone/>
             </a:pPr>
             <a:r>
-              <a:rPr lang="en-US" sz="4400" b="0" u="none" strike="noStrike">
-                <a:solidFill>
-                  <a:schemeClr val="dk1"/>
-                </a:solidFill>
-                <a:effectLst/>
-                <a:uFillTx/>
-                <a:latin typeface="Calibri"/>
-              </a:rPr>
-              <a:t>Digital Solutions</a:t>
-            </a:r>
-            <a:endParaRPr lang="en-US" sz="4400" b="0" u="none" strike="noStrike">
+              <a:rPr lang="en-US" sz="3200" b="1" u="none" strike="noStrike">
+                <a:solidFill>
+                  <a:srgbClr val="0F766E"/>
+                </a:solidFill>
+                <a:effectLst/>
+                <a:uFillTx/>
+                <a:latin typeface="Calibri"/>
+              </a:rPr>
+              <a:t>4. Modern Societal Challenge II: Urbanization &amp; Infrastructure</a:t>
+            </a:r>
+            <a:endParaRPr lang="en-US" sz="3200" b="1" u="none" strike="noStrike">
               <a:solidFill>
                 <a:srgbClr val="FFFFFF"/>
               </a:solidFill>
@@ -8737,28 +9060,31 @@
                 <a:spcPct val="100000"/>
               </a:lnSpc>
               <a:spcBef>
-                <a:spcPts val="641"/>
-              </a:spcBef>
-              <a:buClr>
-                <a:srgbClr val="000000"/>
+                <a:spcPts val="400"/>
+              </a:spcBef>
+              <a:spcAft>
+                <a:spcPts val="1400"/>
+              </a:spcAft>
+              <a:buClr>
+                <a:srgbClr val="1E293B"/>
               </a:buClr>
               <a:buFont typeface="Arial"/>
               <a:buChar char="•"/>
             </a:pPr>
             <a:r>
-              <a:rPr lang="en-US" sz="3200" b="0" u="none" strike="noStrike">
-                <a:solidFill>
-                  <a:schemeClr val="dk1"/>
-                </a:solidFill>
-                <a:effectLst/>
-                <a:uFillTx/>
-                <a:latin typeface="Calibri"/>
-              </a:rPr>
-              <a:t>Leveraging full-stack web applications for municipalities</a:t>
-            </a:r>
-            <a:endParaRPr lang="en-US" sz="3200" b="0" u="none" strike="noStrike">
-              <a:solidFill>
-                <a:srgbClr val="666666"/>
+              <a:rPr lang="en-US" sz="2000" b="0" u="none" strike="noStrike">
+                <a:solidFill>
+                  <a:srgbClr val="1E293B"/>
+                </a:solidFill>
+                <a:effectLst/>
+                <a:uFillTx/>
+                <a:latin typeface="Calibri"/>
+              </a:rPr>
+              <a:t>Rural-to-urban migration strains municipal sanitation, housing, and transport networks.</a:t>
+            </a:r>
+            <a:endParaRPr lang="en-US" sz="2000" b="1" u="none" strike="noStrike">
+              <a:solidFill>
+                <a:srgbClr val="2C3E50"/>
               </a:solidFill>
               <a:effectLst/>
               <a:uFillTx/>
@@ -8771,28 +9097,31 @@
                 <a:spcPct val="100000"/>
               </a:lnSpc>
               <a:spcBef>
-                <a:spcPts val="641"/>
-              </a:spcBef>
-              <a:buClr>
-                <a:srgbClr val="000000"/>
+                <a:spcPts val="400"/>
+              </a:spcBef>
+              <a:spcAft>
+                <a:spcPts val="1400"/>
+              </a:spcAft>
+              <a:buClr>
+                <a:srgbClr val="1E293B"/>
               </a:buClr>
               <a:buFont typeface="Arial"/>
               <a:buChar char="•"/>
             </a:pPr>
             <a:r>
-              <a:rPr lang="en-US" sz="3200" b="0" u="none" strike="noStrike">
-                <a:solidFill>
-                  <a:schemeClr val="dk1"/>
-                </a:solidFill>
-                <a:effectLst/>
-                <a:uFillTx/>
-                <a:latin typeface="Calibri"/>
-              </a:rPr>
-              <a:t>Translating traditional communal problem-solving to tech</a:t>
-            </a:r>
-            <a:endParaRPr lang="en-US" sz="3200" b="0" u="none" strike="noStrike">
-              <a:solidFill>
-                <a:srgbClr val="666666"/>
+              <a:rPr lang="en-US" sz="2000" b="0" u="none" strike="noStrike">
+                <a:solidFill>
+                  <a:srgbClr val="1E293B"/>
+                </a:solidFill>
+                <a:effectLst/>
+                <a:uFillTx/>
+                <a:latin typeface="Calibri"/>
+              </a:rPr>
+              <a:t>Digital Intervention: Deploying full-stack web systems (like our React Waste Management System) to modernize public services.</a:t>
+            </a:r>
+            <a:endParaRPr lang="en-US" sz="2000" b="1" u="none" strike="noStrike">
+              <a:solidFill>
+                <a:srgbClr val="2C3E50"/>
               </a:solidFill>
               <a:effectLst/>
               <a:uFillTx/>
@@ -8805,28 +9134,31 @@
                 <a:spcPct val="100000"/>
               </a:lnSpc>
               <a:spcBef>
-                <a:spcPts val="641"/>
-              </a:spcBef>
-              <a:buClr>
-                <a:srgbClr val="000000"/>
+                <a:spcPts val="400"/>
+              </a:spcBef>
+              <a:spcAft>
+                <a:spcPts val="1400"/>
+              </a:spcAft>
+              <a:buClr>
+                <a:srgbClr val="1E293B"/>
               </a:buClr>
               <a:buFont typeface="Arial"/>
               <a:buChar char="•"/>
             </a:pPr>
             <a:r>
-              <a:rPr lang="en-US" sz="3200" b="0" u="none" strike="noStrike">
-                <a:solidFill>
-                  <a:schemeClr val="dk1"/>
-                </a:solidFill>
-                <a:effectLst/>
-                <a:uFillTx/>
-                <a:latin typeface="Calibri"/>
-              </a:rPr>
-              <a:t>Building scalable React-based infrastructure</a:t>
-            </a:r>
-            <a:endParaRPr lang="en-US" sz="3200" b="0" u="none" strike="noStrike">
-              <a:solidFill>
-                <a:srgbClr val="666666"/>
+              <a:rPr lang="en-US" sz="2000" b="0" u="none" strike="noStrike">
+                <a:solidFill>
+                  <a:srgbClr val="1E293B"/>
+                </a:solidFill>
+                <a:effectLst/>
+                <a:uFillTx/>
+                <a:latin typeface="Calibri"/>
+              </a:rPr>
+              <a:t>Using algorithmic solvers (TSP) to optimize scarce municipal resources in developing towns.</a:t>
+            </a:r>
+            <a:endParaRPr lang="en-US" sz="2000" b="1" u="none" strike="noStrike">
+              <a:solidFill>
+                <a:srgbClr val="2C3E50"/>
               </a:solidFill>
               <a:effectLst/>
               <a:uFillTx/>
@@ -8848,7 +9180,7 @@
 </p:sld>
 </file>
 
-<file path=ppt/slides/slide4.xml><?xml version="1.0" encoding="utf-8"?>
+<file path=ppt/slides/slide6.xml><?xml version="1.0" encoding="utf-8"?>
 <p:sld xmlns:a="http://schemas.openxmlformats.org/drawingml/2006/main" xmlns:p="http://schemas.openxmlformats.org/presentationml/2006/main" xmlns:r="http://schemas.openxmlformats.org/officeDocument/2006/relationships" xmlns:p14="http://schemas.microsoft.com/office/powerpoint/2010/main" xmlns:p15="http://schemas.microsoft.com/office/powerpoint/2012/main" xmlns:mc="http://schemas.openxmlformats.org/markup-compatibility/2006">
   <p:cSld>
     <p:spTree>
@@ -8900,17 +9232,17 @@
               <a:buNone/>
             </a:pPr>
             <a:r>
-              <a:rPr lang="en-US" sz="4400" b="0" u="none" strike="noStrike">
-                <a:solidFill>
-                  <a:schemeClr val="dk1"/>
-                </a:solidFill>
-                <a:effectLst/>
-                <a:uFillTx/>
-                <a:latin typeface="Calibri"/>
-              </a:rPr>
-              <a:t>Gender Awareness in STEM</a:t>
-            </a:r>
-            <a:endParaRPr lang="en-US" sz="4400" b="0" u="none" strike="noStrike">
+              <a:rPr lang="en-US" sz="3200" b="1" u="none" strike="noStrike">
+                <a:solidFill>
+                  <a:srgbClr val="0F766E"/>
+                </a:solidFill>
+                <a:effectLst/>
+                <a:uFillTx/>
+                <a:latin typeface="Calibri"/>
+              </a:rPr>
+              <a:t>5. Modern Societal Challenge III: Cybersecurity Threats</a:t>
+            </a:r>
+            <a:endParaRPr lang="en-US" sz="3200" b="1" u="none" strike="noStrike">
               <a:solidFill>
                 <a:srgbClr val="FFFFFF"/>
               </a:solidFill>
@@ -8954,28 +9286,31 @@
                 <a:spcPct val="100000"/>
               </a:lnSpc>
               <a:spcBef>
-                <a:spcPts val="641"/>
-              </a:spcBef>
-              <a:buClr>
-                <a:srgbClr val="000000"/>
+                <a:spcPts val="400"/>
+              </a:spcBef>
+              <a:spcAft>
+                <a:spcPts val="1400"/>
+              </a:spcAft>
+              <a:buClr>
+                <a:srgbClr val="1E293B"/>
               </a:buClr>
               <a:buFont typeface="Arial"/>
               <a:buChar char="•"/>
             </a:pPr>
             <a:r>
-              <a:rPr lang="en-US" sz="3200" b="0" u="none" strike="noStrike">
-                <a:solidFill>
-                  <a:schemeClr val="dk1"/>
-                </a:solidFill>
-                <a:effectLst/>
-                <a:uFillTx/>
-                <a:latin typeface="Calibri"/>
-              </a:rPr>
-              <a:t>Promoting inclusive educational initiatives</a:t>
-            </a:r>
-            <a:endParaRPr lang="en-US" sz="3200" b="0" u="none" strike="noStrike">
-              <a:solidFill>
-                <a:srgbClr val="666666"/>
+              <a:rPr lang="en-US" sz="2000" b="0" u="none" strike="noStrike">
+                <a:solidFill>
+                  <a:srgbClr val="1E293B"/>
+                </a:solidFill>
+                <a:effectLst/>
+                <a:uFillTx/>
+                <a:latin typeface="Calibri"/>
+              </a:rPr>
+              <a:t>Rapid digitization in Kenya (mobile money, e-government, cloud banking) has expanded the attack surface for cybercriminals.</a:t>
+            </a:r>
+            <a:endParaRPr lang="en-US" sz="2000" b="1" u="none" strike="noStrike">
+              <a:solidFill>
+                <a:srgbClr val="2C3E50"/>
               </a:solidFill>
               <a:effectLst/>
               <a:uFillTx/>
@@ -8988,28 +9323,31 @@
                 <a:spcPct val="100000"/>
               </a:lnSpc>
               <a:spcBef>
-                <a:spcPts val="641"/>
-              </a:spcBef>
-              <a:buClr>
-                <a:srgbClr val="000000"/>
+                <a:spcPts val="400"/>
+              </a:spcBef>
+              <a:spcAft>
+                <a:spcPts val="1400"/>
+              </a:spcAft>
+              <a:buClr>
+                <a:srgbClr val="1E293B"/>
               </a:buClr>
               <a:buFont typeface="Arial"/>
               <a:buChar char="•"/>
             </a:pPr>
             <a:r>
-              <a:rPr lang="en-US" sz="3200" b="0" u="none" strike="noStrike">
-                <a:solidFill>
-                  <a:schemeClr val="dk1"/>
-                </a:solidFill>
-                <a:effectLst/>
-                <a:uFillTx/>
-                <a:latin typeface="Calibri"/>
-              </a:rPr>
-              <a:t>Ensuring equitable access to technological tools</a:t>
-            </a:r>
-            <a:endParaRPr lang="en-US" sz="3200" b="0" u="none" strike="noStrike">
-              <a:solidFill>
-                <a:srgbClr val="666666"/>
+              <a:rPr lang="en-US" sz="2000" b="0" u="none" strike="noStrike">
+                <a:solidFill>
+                  <a:srgbClr val="1E293B"/>
+                </a:solidFill>
+                <a:effectLst/>
+                <a:uFillTx/>
+                <a:latin typeface="Calibri"/>
+              </a:rPr>
+              <a:t>Rising threats of data breaches, phishing, and identity theft targeting citizens and institutions.</a:t>
+            </a:r>
+            <a:endParaRPr lang="en-US" sz="2000" b="1" u="none" strike="noStrike">
+              <a:solidFill>
+                <a:srgbClr val="2C3E50"/>
               </a:solidFill>
               <a:effectLst/>
               <a:uFillTx/>
@@ -9022,28 +9360,257 @@
                 <a:spcPct val="100000"/>
               </a:lnSpc>
               <a:spcBef>
-                <a:spcPts val="641"/>
-              </a:spcBef>
-              <a:buClr>
-                <a:srgbClr val="000000"/>
+                <a:spcPts val="400"/>
+              </a:spcBef>
+              <a:spcAft>
+                <a:spcPts val="1400"/>
+              </a:spcAft>
+              <a:buClr>
+                <a:srgbClr val="1E293B"/>
               </a:buClr>
               <a:buFont typeface="Arial"/>
               <a:buChar char="•"/>
             </a:pPr>
             <a:r>
-              <a:rPr lang="en-US" sz="3200" b="0" u="none" strike="noStrike">
-                <a:solidFill>
-                  <a:schemeClr val="dk1"/>
-                </a:solidFill>
-                <a:effectLst/>
-                <a:uFillTx/>
-                <a:latin typeface="Calibri"/>
-              </a:rPr>
-              <a:t>Collaborative teamwork as a pillar for success</a:t>
-            </a:r>
-            <a:endParaRPr lang="en-US" sz="3200" b="0" u="none" strike="noStrike">
-              <a:solidFill>
-                <a:srgbClr val="666666"/>
+              <a:rPr lang="en-US" sz="2000" b="0" u="none" strike="noStrike">
+                <a:solidFill>
+                  <a:srgbClr val="1E293B"/>
+                </a:solidFill>
+                <a:effectLst/>
+                <a:uFillTx/>
+                <a:latin typeface="Calibri"/>
+              </a:rPr>
+              <a:t>Mitigation: Enforcing Cisco-standard network security, secure authentication architectures, and public digital literacy.</a:t>
+            </a:r>
+            <a:endParaRPr lang="en-US" sz="2000" b="1" u="none" strike="noStrike">
+              <a:solidFill>
+                <a:srgbClr val="2C3E50"/>
+              </a:solidFill>
+              <a:effectLst/>
+              <a:uFillTx/>
+              <a:latin typeface="Times New Roman"/>
+            </a:endParaRPr>
+          </a:p>
+        </p:txBody>
+      </p:sp>
+    </p:spTree>
+  </p:cSld>
+  <mc:AlternateContent>
+    <mc:Choice Requires="p14">
+      <p:transition spd="slow" p14:dur="2000"/>
+    </mc:Choice>
+    <mc:Fallback>
+      <p:transition spd="slow"/>
+    </mc:Fallback>
+  </mc:AlternateContent>
+</p:sld>
+</file>
+
+<file path=ppt/slides/slide7.xml><?xml version="1.0" encoding="utf-8"?>
+<p:sld xmlns:a="http://schemas.openxmlformats.org/drawingml/2006/main" xmlns:p="http://schemas.openxmlformats.org/presentationml/2006/main" xmlns:r="http://schemas.openxmlformats.org/officeDocument/2006/relationships" xmlns:p14="http://schemas.microsoft.com/office/powerpoint/2010/main" xmlns:p15="http://schemas.microsoft.com/office/powerpoint/2012/main" xmlns:mc="http://schemas.openxmlformats.org/markup-compatibility/2006">
+  <p:cSld>
+    <p:spTree>
+      <p:nvGrpSpPr>
+        <p:cNvPr id="1" name=""/>
+        <p:cNvGrpSpPr/>
+        <p:nvPr/>
+      </p:nvGrpSpPr>
+      <p:grpSpPr>
+        <a:xfrm>
+          <a:off x="0" y="0"/>
+          <a:ext cx="0" cy="0"/>
+          <a:chOff x="0" y="0"/>
+          <a:chExt cx="0" cy="0"/>
+        </a:xfrm>
+      </p:grpSpPr>
+      <p:sp>
+        <p:nvSpPr>
+          <p:cNvPr id="84" name="PlaceHolder 1"/>
+          <p:cNvSpPr>
+            <a:spLocks noGrp="1"/>
+          </p:cNvSpPr>
+          <p:nvPr>
+            <p:ph type="title"/>
+          </p:nvPr>
+        </p:nvSpPr>
+        <p:spPr>
+          <a:xfrm>
+            <a:off x="457200" y="274680"/>
+            <a:ext cx="8229240" cy="1142640"/>
+          </a:xfrm>
+          <a:prstGeom prst="rect">
+            <a:avLst/>
+          </a:prstGeom>
+          <a:noFill/>
+          <a:ln w="0">
+            <a:noFill/>
+          </a:ln>
+        </p:spPr>
+        <p:txBody>
+          <a:bodyPr lIns="91440" tIns="45720" rIns="91440" bIns="45720" anchor="ctr">
+            <a:noAutofit/>
+          </a:bodyPr>
+          <a:p>
+            <a:pPr indent="0" algn="ctr" defTabSz="457200">
+              <a:lnSpc>
+                <a:spcPct val="100000"/>
+              </a:lnSpc>
+              <a:buNone/>
+            </a:pPr>
+            <a:r>
+              <a:rPr lang="en-US" sz="3200" b="1" u="none" strike="noStrike">
+                <a:solidFill>
+                  <a:srgbClr val="0F766E"/>
+                </a:solidFill>
+                <a:effectLst/>
+                <a:uFillTx/>
+                <a:latin typeface="Calibri"/>
+              </a:rPr>
+              <a:t>6. Synthesis: The Ethical IT Professional</a:t>
+            </a:r>
+            <a:endParaRPr lang="en-US" sz="3200" b="1" u="none" strike="noStrike">
+              <a:solidFill>
+                <a:srgbClr val="FFFFFF"/>
+              </a:solidFill>
+              <a:effectLst/>
+              <a:uFillTx/>
+              <a:latin typeface="Times New Roman"/>
+            </a:endParaRPr>
+          </a:p>
+        </p:txBody>
+      </p:sp>
+      <p:sp>
+        <p:nvSpPr>
+          <p:cNvPr id="85" name="PlaceHolder 2"/>
+          <p:cNvSpPr>
+            <a:spLocks noGrp="1"/>
+          </p:cNvSpPr>
+          <p:nvPr>
+            <p:ph/>
+          </p:nvPr>
+        </p:nvSpPr>
+        <p:spPr>
+          <a:xfrm>
+            <a:off x="457200" y="1600200"/>
+            <a:ext cx="8229240" cy="4525560"/>
+          </a:xfrm>
+          <a:prstGeom prst="rect">
+            <a:avLst/>
+          </a:prstGeom>
+          <a:noFill/>
+          <a:ln w="0">
+            <a:noFill/>
+          </a:ln>
+        </p:spPr>
+        <p:txBody>
+          <a:bodyPr lIns="91440" tIns="45720" rIns="91440" bIns="45720" anchor="t">
+            <a:noAutofit/>
+          </a:bodyPr>
+          <a:p>
+            <a:pPr marL="343080" indent="-343080" algn="l" defTabSz="457200">
+              <a:lnSpc>
+                <a:spcPct val="100000"/>
+              </a:lnSpc>
+              <a:spcBef>
+                <a:spcPts val="400"/>
+              </a:spcBef>
+              <a:spcAft>
+                <a:spcPts val="1400"/>
+              </a:spcAft>
+              <a:buClr>
+                <a:srgbClr val="1E293B"/>
+              </a:buClr>
+              <a:buFont typeface="Arial"/>
+              <a:buChar char="•"/>
+            </a:pPr>
+            <a:r>
+              <a:rPr lang="en-US" sz="2000" b="0" u="none" strike="noStrike">
+                <a:solidFill>
+                  <a:srgbClr val="1E293B"/>
+                </a:solidFill>
+                <a:effectLst/>
+                <a:uFillTx/>
+                <a:latin typeface="Calibri"/>
+              </a:rPr>
+              <a:t>Technology alone cannot solve societal challenges without moral grounding and servant leadership.</a:t>
+            </a:r>
+            <a:endParaRPr lang="en-US" sz="2000" b="1" u="none" strike="noStrike">
+              <a:solidFill>
+                <a:srgbClr val="2C3E50"/>
+              </a:solidFill>
+              <a:effectLst/>
+              <a:uFillTx/>
+              <a:latin typeface="Times New Roman"/>
+            </a:endParaRPr>
+          </a:p>
+          <a:p>
+            <a:pPr marL="343080" indent="-343080" algn="l" defTabSz="457200">
+              <a:lnSpc>
+                <a:spcPct val="100000"/>
+              </a:lnSpc>
+              <a:spcBef>
+                <a:spcPts val="400"/>
+              </a:spcBef>
+              <a:spcAft>
+                <a:spcPts val="1400"/>
+              </a:spcAft>
+              <a:buClr>
+                <a:srgbClr val="1E293B"/>
+              </a:buClr>
+              <a:buFont typeface="Arial"/>
+              <a:buChar char="•"/>
+            </a:pPr>
+            <a:r>
+              <a:rPr lang="en-US" sz="2000" b="0" u="none" strike="noStrike">
+                <a:solidFill>
+                  <a:srgbClr val="1E293B"/>
+                </a:solidFill>
+                <a:effectLst/>
+                <a:uFillTx/>
+                <a:latin typeface="Calibri"/>
+              </a:rPr>
+              <a:t>Combining technical fluency (Python, React, Linux, Cybersecurity) with community service (children's home outreach, faith leadership).</a:t>
+            </a:r>
+            <a:endParaRPr lang="en-US" sz="2000" b="1" u="none" strike="noStrike">
+              <a:solidFill>
+                <a:srgbClr val="2C3E50"/>
+              </a:solidFill>
+              <a:effectLst/>
+              <a:uFillTx/>
+              <a:latin typeface="Times New Roman"/>
+            </a:endParaRPr>
+          </a:p>
+          <a:p>
+            <a:pPr marL="343080" indent="-343080" algn="l" defTabSz="457200">
+              <a:lnSpc>
+                <a:spcPct val="100000"/>
+              </a:lnSpc>
+              <a:spcBef>
+                <a:spcPts val="400"/>
+              </a:spcBef>
+              <a:spcAft>
+                <a:spcPts val="1400"/>
+              </a:spcAft>
+              <a:buClr>
+                <a:srgbClr val="1E293B"/>
+              </a:buClr>
+              <a:buFont typeface="Arial"/>
+              <a:buChar char="•"/>
+            </a:pPr>
+            <a:r>
+              <a:rPr lang="en-US" sz="2000" b="0" u="none" strike="noStrike">
+                <a:solidFill>
+                  <a:srgbClr val="1E293B"/>
+                </a:solidFill>
+                <a:effectLst/>
+                <a:uFillTx/>
+                <a:latin typeface="Calibri"/>
+              </a:rPr>
+              <a:t>Building a future where African cultural unity powers ethical, world-class technological advancement.</a:t>
+            </a:r>
+            <a:endParaRPr lang="en-US" sz="2000" b="1" u="none" strike="noStrike">
+              <a:solidFill>
+                <a:srgbClr val="2C3E50"/>
               </a:solidFill>
               <a:effectLst/>
               <a:uFillTx/>
